--- a/templates/PPT_template/Chinese_Culture_Template.pptx
+++ b/templates/PPT_template/Chinese_Culture_Template.pptx
@@ -3098,7 +3098,7 @@
     <p:bg>
       <p:bgPr>
         <a:solidFill>
-          <a:srgbClr val="8C2D2D"/>
+          <a:srgbClr val="FBF7F0"/>
         </a:solidFill>
         <a:effectLst/>
       </p:bgPr>
@@ -3112,20 +3112,20 @@
       <p:grpSpPr/>
       <p:sp>
         <p:nvSpPr>
-          <p:cNvPr id="2" name="Oval 1"/>
+          <p:cNvPr id="2" name="Rectangle 1"/>
           <p:cNvSpPr/>
           <p:nvPr/>
         </p:nvSpPr>
         <p:spPr>
           <a:xfrm>
-            <a:off x="8595360" y="-1463040"/>
-            <a:ext cx="4572000" cy="4572000"/>
-          </a:xfrm>
-          <a:prstGeom prst="ellipse">
+            <a:off x="0" y="0"/>
+            <a:ext cx="274320" cy="6858000"/>
+          </a:xfrm>
+          <a:prstGeom prst="rect">
             <a:avLst/>
           </a:prstGeom>
           <a:solidFill>
-            <a:srgbClr val="F0DFC8"/>
+            <a:srgbClr val="8C2D2D"/>
           </a:solidFill>
           <a:ln>
             <a:noFill/>
@@ -3162,8 +3162,8 @@
         </p:nvSpPr>
         <p:spPr>
           <a:xfrm>
-            <a:off x="0" y="0"/>
-            <a:ext cx="146304" cy="6858000"/>
+            <a:off x="274320" y="0"/>
+            <a:ext cx="73152" cy="6858000"/>
           </a:xfrm>
           <a:prstGeom prst="rect">
             <a:avLst/>
@@ -3200,14 +3200,58 @@
       </p:sp>
       <p:sp>
         <p:nvSpPr>
-          <p:cNvPr id="4" name="TextBox 3"/>
-          <p:cNvSpPr txBox="1"/>
-          <p:nvPr/>
-        </p:nvSpPr>
-        <p:spPr>
-          <a:xfrm>
-            <a:off x="868680" y="6263640"/>
-            <a:ext cx="5486400" cy="365760"/>
+          <p:cNvPr id="4" name="Rectangle 3"/>
+          <p:cNvSpPr/>
+          <p:nvPr/>
+        </p:nvSpPr>
+        <p:spPr>
+          <a:xfrm>
+            <a:off x="1463040" y="3657600"/>
+            <a:ext cx="2194560" cy="82296"/>
+          </a:xfrm>
+          <a:prstGeom prst="rect">
+            <a:avLst/>
+          </a:prstGeom>
+          <a:solidFill>
+            <a:srgbClr val="8C2D2D"/>
+          </a:solidFill>
+          <a:ln>
+            <a:noFill/>
+          </a:ln>
+          <a:effectLst/>
+        </p:spPr>
+        <p:style>
+          <a:lnRef idx="1">
+            <a:schemeClr val="accent1"/>
+          </a:lnRef>
+          <a:fillRef idx="3">
+            <a:schemeClr val="accent1"/>
+          </a:fillRef>
+          <a:effectRef idx="2">
+            <a:schemeClr val="accent1"/>
+          </a:effectRef>
+          <a:fontRef idx="minor">
+            <a:schemeClr val="lt1"/>
+          </a:fontRef>
+        </p:style>
+        <p:txBody>
+          <a:bodyPr rtlCol="0" anchor="ctr"/>
+          <a:lstStyle/>
+          <a:p>
+            <a:pPr algn="ctr"/>
+          </a:p>
+        </p:txBody>
+      </p:sp>
+      <p:sp>
+        <p:nvSpPr>
+          <p:cNvPr id="5" name="TextBox 4"/>
+          <p:cNvSpPr txBox="1"/>
+          <p:nvPr/>
+        </p:nvSpPr>
+        <p:spPr>
+          <a:xfrm>
+            <a:off x="1463040" y="6309360"/>
+            <a:ext cx="3657600" cy="365760"/>
           </a:xfrm>
           <a:prstGeom prst="rect">
             <a:avLst/>
@@ -3224,7 +3268,7 @@
             <a:r>
               <a:rPr sz="1000" b="0">
                 <a:solidFill>
-                  <a:srgbClr val="FFF6E8"/>
+                  <a:srgbClr val="8A7A63"/>
                 </a:solidFill>
                 <a:latin typeface="Microsoft YaHei"/>
               </a:rPr>
@@ -3235,14 +3279,14 @@
       </p:sp>
       <p:sp>
         <p:nvSpPr>
-          <p:cNvPr id="5" name="TextBox 4"/>
-          <p:cNvSpPr txBox="1"/>
-          <p:nvPr/>
-        </p:nvSpPr>
-        <p:spPr>
-          <a:xfrm>
-            <a:off x="914400" y="1828800"/>
-            <a:ext cx="10332720" cy="1737360"/>
+          <p:cNvPr id="6" name="TextBox 5"/>
+          <p:cNvSpPr txBox="1"/>
+          <p:nvPr/>
+        </p:nvSpPr>
+        <p:spPr>
+          <a:xfrm>
+            <a:off x="1463040" y="2148840"/>
+            <a:ext cx="9966960" cy="1463040"/>
           </a:xfrm>
           <a:prstGeom prst="rect">
             <a:avLst/>
@@ -3255,11 +3299,11 @@
           </a:bodyPr>
           <a:lstStyle/>
           <a:p>
-            <a:pPr algn="l"/>
+            <a:pPr algn="ctr"/>
             <a:r>
               <a:rPr sz="4000" b="1" i="0">
                 <a:solidFill>
-                  <a:srgbClr val="FFF6E8"/>
+                  <a:srgbClr val="8C2D2D"/>
                 </a:solidFill>
                 <a:latin typeface="Microsoft YaHei"/>
               </a:rPr>
@@ -3270,14 +3314,14 @@
       </p:sp>
       <p:sp>
         <p:nvSpPr>
-          <p:cNvPr id="6" name="TextBox 5"/>
-          <p:cNvSpPr txBox="1"/>
-          <p:nvPr/>
-        </p:nvSpPr>
-        <p:spPr>
-          <a:xfrm>
-            <a:off x="914400" y="3749039"/>
-            <a:ext cx="10332720" cy="822960"/>
+          <p:cNvPr id="7" name="TextBox 6"/>
+          <p:cNvSpPr txBox="1"/>
+          <p:nvPr/>
+        </p:nvSpPr>
+        <p:spPr>
+          <a:xfrm>
+            <a:off x="1463040" y="3794760"/>
+            <a:ext cx="9966960" cy="640080"/>
           </a:xfrm>
           <a:prstGeom prst="rect">
             <a:avLst/>
@@ -3290,11 +3334,11 @@
           </a:bodyPr>
           <a:lstStyle/>
           <a:p>
-            <a:pPr algn="l"/>
-            <a:r>
-              <a:rPr sz="2000" b="0" i="0">
-                <a:solidFill>
-                  <a:srgbClr val="FFF6E8"/>
+            <a:pPr algn="ctr"/>
+            <a:r>
+              <a:rPr sz="1800" b="0" i="0">
+                <a:solidFill>
+                  <a:srgbClr val="8A7A63"/>
                 </a:solidFill>
                 <a:latin typeface="Microsoft YaHei"/>
               </a:rPr>
@@ -3338,7 +3382,7 @@
         <p:spPr>
           <a:xfrm>
             <a:off x="0" y="0"/>
-            <a:ext cx="118872" cy="6858000"/>
+            <a:ext cx="164592" cy="6858000"/>
           </a:xfrm>
           <a:prstGeom prst="rect">
             <a:avLst/>
@@ -3451,7 +3495,7 @@
         </p:nvSpPr>
         <p:spPr>
           <a:xfrm>
-            <a:off x="548640" y="457200"/>
+            <a:off x="548640" y="502920"/>
             <a:ext cx="11064240" cy="777240"/>
           </a:xfrm>
           <a:prstGeom prst="rect">
@@ -3465,9 +3509,9 @@
           </a:bodyPr>
           <a:lstStyle/>
           <a:p>
-            <a:pPr algn="l"/>
-            <a:r>
-              <a:rPr sz="2800" b="1" i="0">
+            <a:pPr algn="ctr"/>
+            <a:r>
+              <a:rPr sz="3000" b="1" i="0">
                 <a:solidFill>
                   <a:srgbClr val="8C2D2D"/>
                 </a:solidFill>
@@ -3486,14 +3530,14 @@
         </p:nvSpPr>
         <p:spPr>
           <a:xfrm>
-            <a:off x="566928" y="1298448"/>
-            <a:ext cx="1234440" cy="82296"/>
+            <a:off x="5394960" y="1298448"/>
+            <a:ext cx="1371600" cy="82296"/>
           </a:xfrm>
           <a:prstGeom prst="rect">
             <a:avLst/>
           </a:prstGeom>
           <a:solidFill>
-            <a:srgbClr val="F0DFC8"/>
+            <a:srgbClr val="8C2D2D"/>
           </a:solidFill>
           <a:ln>
             <a:noFill/>
@@ -3530,8 +3574,8 @@
         </p:nvSpPr>
         <p:spPr>
           <a:xfrm>
-            <a:off x="594360" y="1691640"/>
-            <a:ext cx="2606040" cy="1051560"/>
+            <a:off x="640080" y="1737360"/>
+            <a:ext cx="2651760" cy="1005840"/>
           </a:xfrm>
           <a:prstGeom prst="rect">
             <a:avLst/>
@@ -3544,9 +3588,9 @@
           </a:bodyPr>
           <a:lstStyle/>
           <a:p>
-            <a:pPr algn="l"/>
-            <a:r>
-              <a:rPr sz="1600" b="1" i="0">
+            <a:pPr algn="ctr"/>
+            <a:r>
+              <a:rPr sz="1700" b="1" i="0">
                 <a:solidFill>
                   <a:srgbClr val="2B2118"/>
                 </a:solidFill>
@@ -3565,8 +3609,8 @@
         </p:nvSpPr>
         <p:spPr>
           <a:xfrm>
-            <a:off x="3429000" y="1691640"/>
-            <a:ext cx="2606040" cy="1051560"/>
+            <a:off x="6126480" y="1737360"/>
+            <a:ext cx="2651760" cy="1005840"/>
           </a:xfrm>
           <a:prstGeom prst="rect">
             <a:avLst/>
@@ -3579,9 +3623,9 @@
           </a:bodyPr>
           <a:lstStyle/>
           <a:p>
-            <a:pPr algn="l"/>
-            <a:r>
-              <a:rPr sz="1600" b="1" i="0">
+            <a:pPr algn="ctr"/>
+            <a:r>
+              <a:rPr sz="1700" b="1" i="0">
                 <a:solidFill>
                   <a:srgbClr val="2B2118"/>
                 </a:solidFill>
@@ -3600,8 +3644,8 @@
         </p:nvSpPr>
         <p:spPr>
           <a:xfrm>
-            <a:off x="6263640" y="1691640"/>
-            <a:ext cx="2606040" cy="1051560"/>
+            <a:off x="11612880" y="1737360"/>
+            <a:ext cx="2651760" cy="1005840"/>
           </a:xfrm>
           <a:prstGeom prst="rect">
             <a:avLst/>
@@ -3614,9 +3658,9 @@
           </a:bodyPr>
           <a:lstStyle/>
           <a:p>
-            <a:pPr algn="l"/>
-            <a:r>
-              <a:rPr sz="1600" b="1" i="0">
+            <a:pPr algn="ctr"/>
+            <a:r>
+              <a:rPr sz="1700" b="1" i="0">
                 <a:solidFill>
                   <a:srgbClr val="2B2118"/>
                 </a:solidFill>
@@ -3635,8 +3679,8 @@
         </p:nvSpPr>
         <p:spPr>
           <a:xfrm>
-            <a:off x="9098280" y="1691640"/>
-            <a:ext cx="2606040" cy="1051560"/>
+            <a:off x="17099280" y="1737360"/>
+            <a:ext cx="2651760" cy="1005840"/>
           </a:xfrm>
           <a:prstGeom prst="rect">
             <a:avLst/>
@@ -3649,9 +3693,9 @@
           </a:bodyPr>
           <a:lstStyle/>
           <a:p>
-            <a:pPr algn="l"/>
-            <a:r>
-              <a:rPr sz="1600" b="1" i="0">
+            <a:pPr algn="ctr"/>
+            <a:r>
+              <a:rPr sz="1700" b="1" i="0">
                 <a:solidFill>
                   <a:srgbClr val="2B2118"/>
                 </a:solidFill>
@@ -3670,8 +3714,8 @@
         </p:nvSpPr>
         <p:spPr>
           <a:xfrm>
-            <a:off x="594360" y="3108960"/>
-            <a:ext cx="2743200" cy="457200"/>
+            <a:off x="640080" y="3108960"/>
+            <a:ext cx="10972800" cy="457200"/>
           </a:xfrm>
           <a:prstGeom prst="rect">
             <a:avLst/>
@@ -3684,9 +3728,9 @@
           </a:bodyPr>
           <a:lstStyle/>
           <a:p>
-            <a:pPr algn="l"/>
-            <a:r>
-              <a:rPr sz="1400" b="1" i="0">
+            <a:pPr algn="ctr"/>
+            <a:r>
+              <a:rPr sz="1500" b="1" i="0">
                 <a:solidFill>
                   <a:srgbClr val="8C2D2D"/>
                 </a:solidFill>
@@ -3705,7 +3749,7 @@
         </p:nvSpPr>
         <p:spPr>
           <a:xfrm>
-            <a:off x="594360" y="3657600"/>
+            <a:off x="640080" y="3657600"/>
             <a:ext cx="10972800" cy="1097280"/>
           </a:xfrm>
           <a:prstGeom prst="rect">
@@ -3719,9 +3763,9 @@
           </a:bodyPr>
           <a:lstStyle/>
           <a:p>
-            <a:pPr algn="l"/>
-            <a:r>
-              <a:rPr sz="1600" b="0" i="0">
+            <a:pPr algn="ctr"/>
+            <a:r>
+              <a:rPr sz="1700" b="0" i="0">
                 <a:solidFill>
                   <a:srgbClr val="2B2118"/>
                 </a:solidFill>
@@ -3767,7 +3811,7 @@
         <p:spPr>
           <a:xfrm>
             <a:off x="0" y="0"/>
-            <a:ext cx="118872" cy="6858000"/>
+            <a:ext cx="164592" cy="6858000"/>
           </a:xfrm>
           <a:prstGeom prst="rect">
             <a:avLst/>
@@ -3880,7 +3924,7 @@
         </p:nvSpPr>
         <p:spPr>
           <a:xfrm>
-            <a:off x="548640" y="457200"/>
+            <a:off x="548640" y="502920"/>
             <a:ext cx="11064240" cy="777240"/>
           </a:xfrm>
           <a:prstGeom prst="rect">
@@ -3894,9 +3938,9 @@
           </a:bodyPr>
           <a:lstStyle/>
           <a:p>
-            <a:pPr algn="l"/>
-            <a:r>
-              <a:rPr sz="2800" b="1" i="0">
+            <a:pPr algn="ctr"/>
+            <a:r>
+              <a:rPr sz="3000" b="1" i="0">
                 <a:solidFill>
                   <a:srgbClr val="8C2D2D"/>
                 </a:solidFill>
@@ -3915,14 +3959,14 @@
         </p:nvSpPr>
         <p:spPr>
           <a:xfrm>
-            <a:off x="566928" y="1298448"/>
-            <a:ext cx="1234440" cy="82296"/>
+            <a:off x="5394960" y="1298448"/>
+            <a:ext cx="1371600" cy="82296"/>
           </a:xfrm>
           <a:prstGeom prst="rect">
             <a:avLst/>
           </a:prstGeom>
           <a:solidFill>
-            <a:srgbClr val="F0DFC8"/>
+            <a:srgbClr val="8C2D2D"/>
           </a:solidFill>
           <a:ln>
             <a:noFill/>
@@ -3959,7 +4003,7 @@
         </p:nvSpPr>
         <p:spPr>
           <a:xfrm>
-            <a:off x="594360" y="1783080"/>
+            <a:off x="640080" y="1828800"/>
             <a:ext cx="10972800" cy="822960"/>
           </a:xfrm>
           <a:prstGeom prst="rect">
@@ -3973,7 +4017,7 @@
           </a:bodyPr>
           <a:lstStyle/>
           <a:p>
-            <a:pPr algn="l"/>
+            <a:pPr algn="ctr"/>
             <a:r>
               <a:rPr sz="1800" b="1" i="0">
                 <a:solidFill>
@@ -3994,8 +4038,8 @@
         </p:nvSpPr>
         <p:spPr>
           <a:xfrm>
-            <a:off x="594360" y="2880360"/>
-            <a:ext cx="10972800" cy="777240"/>
+            <a:off x="640080" y="3017520"/>
+            <a:ext cx="10972800" cy="731520"/>
           </a:xfrm>
           <a:prstGeom prst="rect">
             <a:avLst/>
@@ -4008,9 +4052,9 @@
           </a:bodyPr>
           <a:lstStyle/>
           <a:p>
-            <a:pPr algn="l"/>
-            <a:r>
-              <a:rPr sz="1600" b="0" i="0">
+            <a:pPr algn="ctr"/>
+            <a:r>
+              <a:rPr sz="1700" b="0" i="0">
                 <a:solidFill>
                   <a:srgbClr val="2B2118"/>
                 </a:solidFill>
@@ -4029,8 +4073,8 @@
         </p:nvSpPr>
         <p:spPr>
           <a:xfrm>
-            <a:off x="594360" y="3840480"/>
-            <a:ext cx="10972800" cy="777240"/>
+            <a:off x="640080" y="4617720"/>
+            <a:ext cx="10972800" cy="731520"/>
           </a:xfrm>
           <a:prstGeom prst="rect">
             <a:avLst/>
@@ -4043,9 +4087,9 @@
           </a:bodyPr>
           <a:lstStyle/>
           <a:p>
-            <a:pPr algn="l"/>
-            <a:r>
-              <a:rPr sz="1600" b="0" i="0">
+            <a:pPr algn="ctr"/>
+            <a:r>
+              <a:rPr sz="1700" b="0" i="0">
                 <a:solidFill>
                   <a:srgbClr val="2B2118"/>
                 </a:solidFill>
@@ -4064,8 +4108,8 @@
         </p:nvSpPr>
         <p:spPr>
           <a:xfrm>
-            <a:off x="594360" y="4800600"/>
-            <a:ext cx="10972800" cy="777240"/>
+            <a:off x="640080" y="6217920"/>
+            <a:ext cx="10972800" cy="731520"/>
           </a:xfrm>
           <a:prstGeom prst="rect">
             <a:avLst/>
@@ -4078,9 +4122,9 @@
           </a:bodyPr>
           <a:lstStyle/>
           <a:p>
-            <a:pPr algn="l"/>
-            <a:r>
-              <a:rPr sz="1600" b="0" i="0">
+            <a:pPr algn="ctr"/>
+            <a:r>
+              <a:rPr sz="1700" b="0" i="0">
                 <a:solidFill>
                   <a:srgbClr val="2B2118"/>
                 </a:solidFill>
@@ -4126,7 +4170,7 @@
         <p:spPr>
           <a:xfrm>
             <a:off x="0" y="0"/>
-            <a:ext cx="118872" cy="6858000"/>
+            <a:ext cx="164592" cy="6858000"/>
           </a:xfrm>
           <a:prstGeom prst="rect">
             <a:avLst/>
@@ -4239,7 +4283,7 @@
         </p:nvSpPr>
         <p:spPr>
           <a:xfrm>
-            <a:off x="548640" y="457200"/>
+            <a:off x="548640" y="502920"/>
             <a:ext cx="11064240" cy="777240"/>
           </a:xfrm>
           <a:prstGeom prst="rect">
@@ -4253,9 +4297,9 @@
           </a:bodyPr>
           <a:lstStyle/>
           <a:p>
-            <a:pPr algn="l"/>
-            <a:r>
-              <a:rPr sz="2800" b="1" i="0">
+            <a:pPr algn="ctr"/>
+            <a:r>
+              <a:rPr sz="3000" b="1" i="0">
                 <a:solidFill>
                   <a:srgbClr val="8C2D2D"/>
                 </a:solidFill>
@@ -4274,14 +4318,14 @@
         </p:nvSpPr>
         <p:spPr>
           <a:xfrm>
-            <a:off x="566928" y="1298448"/>
-            <a:ext cx="1234440" cy="82296"/>
+            <a:off x="5394960" y="1298448"/>
+            <a:ext cx="1371600" cy="82296"/>
           </a:xfrm>
           <a:prstGeom prst="rect">
             <a:avLst/>
           </a:prstGeom>
           <a:solidFill>
-            <a:srgbClr val="F0DFC8"/>
+            <a:srgbClr val="8C2D2D"/>
           </a:solidFill>
           <a:ln>
             <a:noFill/>
@@ -4318,7 +4362,287 @@
         </p:nvSpPr>
         <p:spPr>
           <a:xfrm>
-            <a:off x="594360" y="1645920"/>
+            <a:off x="640080" y="1783080"/>
+            <a:ext cx="10972800" cy="566928"/>
+          </a:xfrm>
+          <a:prstGeom prst="rect">
+            <a:avLst/>
+          </a:prstGeom>
+          <a:noFill/>
+        </p:spPr>
+        <p:txBody>
+          <a:bodyPr wrap="square" lIns="18288" rIns="18288" tIns="9144" bIns="9144" anchor="ctr">
+            <a:spAutoFit/>
+          </a:bodyPr>
+          <a:lstStyle/>
+          <a:p>
+            <a:pPr algn="ctr"/>
+            <a:r>
+              <a:rPr sz="1700" b="0" i="0">
+                <a:solidFill>
+                  <a:srgbClr val="2B2118"/>
+                </a:solidFill>
+                <a:latin typeface="Microsoft YaHei"/>
+              </a:rPr>
+              <a:t/>
+            </a:r>
+          </a:p>
+        </p:txBody>
+      </p:sp>
+      <p:sp>
+        <p:nvSpPr>
+          <p:cNvPr id="8" name="TextBox 7"/>
+          <p:cNvSpPr txBox="1"/>
+          <p:nvPr/>
+        </p:nvSpPr>
+        <p:spPr>
+          <a:xfrm>
+            <a:off x="640080" y="2807208"/>
+            <a:ext cx="10972800" cy="566928"/>
+          </a:xfrm>
+          <a:prstGeom prst="rect">
+            <a:avLst/>
+          </a:prstGeom>
+          <a:noFill/>
+        </p:spPr>
+        <p:txBody>
+          <a:bodyPr wrap="square" lIns="18288" rIns="18288" tIns="9144" bIns="9144" anchor="ctr">
+            <a:spAutoFit/>
+          </a:bodyPr>
+          <a:lstStyle/>
+          <a:p>
+            <a:pPr algn="ctr"/>
+            <a:r>
+              <a:rPr sz="1700" b="0" i="0">
+                <a:solidFill>
+                  <a:srgbClr val="2B2118"/>
+                </a:solidFill>
+                <a:latin typeface="Microsoft YaHei"/>
+              </a:rPr>
+              <a:t/>
+            </a:r>
+          </a:p>
+        </p:txBody>
+      </p:sp>
+      <p:sp>
+        <p:nvSpPr>
+          <p:cNvPr id="9" name="TextBox 8"/>
+          <p:cNvSpPr txBox="1"/>
+          <p:nvPr/>
+        </p:nvSpPr>
+        <p:spPr>
+          <a:xfrm>
+            <a:off x="640080" y="3831336"/>
+            <a:ext cx="10972800" cy="566928"/>
+          </a:xfrm>
+          <a:prstGeom prst="rect">
+            <a:avLst/>
+          </a:prstGeom>
+          <a:noFill/>
+        </p:spPr>
+        <p:txBody>
+          <a:bodyPr wrap="square" lIns="18288" rIns="18288" tIns="9144" bIns="9144" anchor="ctr">
+            <a:spAutoFit/>
+          </a:bodyPr>
+          <a:lstStyle/>
+          <a:p>
+            <a:pPr algn="ctr"/>
+            <a:r>
+              <a:rPr sz="1700" b="0" i="0">
+                <a:solidFill>
+                  <a:srgbClr val="2B2118"/>
+                </a:solidFill>
+                <a:latin typeface="Microsoft YaHei"/>
+              </a:rPr>
+              <a:t/>
+            </a:r>
+          </a:p>
+        </p:txBody>
+      </p:sp>
+      <p:sp>
+        <p:nvSpPr>
+          <p:cNvPr id="10" name="TextBox 9"/>
+          <p:cNvSpPr txBox="1"/>
+          <p:nvPr/>
+        </p:nvSpPr>
+        <p:spPr>
+          <a:xfrm>
+            <a:off x="640080" y="4855464"/>
+            <a:ext cx="10972800" cy="566928"/>
+          </a:xfrm>
+          <a:prstGeom prst="rect">
+            <a:avLst/>
+          </a:prstGeom>
+          <a:noFill/>
+        </p:spPr>
+        <p:txBody>
+          <a:bodyPr wrap="square" lIns="18288" rIns="18288" tIns="9144" bIns="9144" anchor="ctr">
+            <a:spAutoFit/>
+          </a:bodyPr>
+          <a:lstStyle/>
+          <a:p>
+            <a:pPr algn="ctr"/>
+            <a:r>
+              <a:rPr sz="1700" b="0" i="0">
+                <a:solidFill>
+                  <a:srgbClr val="2B2118"/>
+                </a:solidFill>
+                <a:latin typeface="Microsoft YaHei"/>
+              </a:rPr>
+              <a:t/>
+            </a:r>
+          </a:p>
+        </p:txBody>
+      </p:sp>
+      <p:sp>
+        <p:nvSpPr>
+          <p:cNvPr id="11" name="TextBox 10"/>
+          <p:cNvSpPr txBox="1"/>
+          <p:nvPr/>
+        </p:nvSpPr>
+        <p:spPr>
+          <a:xfrm>
+            <a:off x="640080" y="5879592"/>
+            <a:ext cx="10972800" cy="566928"/>
+          </a:xfrm>
+          <a:prstGeom prst="rect">
+            <a:avLst/>
+          </a:prstGeom>
+          <a:noFill/>
+        </p:spPr>
+        <p:txBody>
+          <a:bodyPr wrap="square" lIns="18288" rIns="18288" tIns="9144" bIns="9144" anchor="ctr">
+            <a:spAutoFit/>
+          </a:bodyPr>
+          <a:lstStyle/>
+          <a:p>
+            <a:pPr algn="ctr"/>
+            <a:r>
+              <a:rPr sz="1700" b="0" i="0">
+                <a:solidFill>
+                  <a:srgbClr val="2B2118"/>
+                </a:solidFill>
+                <a:latin typeface="Microsoft YaHei"/>
+              </a:rPr>
+              <a:t/>
+            </a:r>
+          </a:p>
+        </p:txBody>
+      </p:sp>
+      <p:sp>
+        <p:nvSpPr>
+          <p:cNvPr id="12" name="TextBox 11"/>
+          <p:cNvSpPr txBox="1"/>
+          <p:nvPr/>
+        </p:nvSpPr>
+        <p:spPr>
+          <a:xfrm>
+            <a:off x="640080" y="6903720"/>
+            <a:ext cx="10972800" cy="566928"/>
+          </a:xfrm>
+          <a:prstGeom prst="rect">
+            <a:avLst/>
+          </a:prstGeom>
+          <a:noFill/>
+        </p:spPr>
+        <p:txBody>
+          <a:bodyPr wrap="square" lIns="18288" rIns="18288" tIns="9144" bIns="9144" anchor="ctr">
+            <a:spAutoFit/>
+          </a:bodyPr>
+          <a:lstStyle/>
+          <a:p>
+            <a:pPr algn="ctr"/>
+            <a:r>
+              <a:rPr sz="1700" b="0" i="0">
+                <a:solidFill>
+                  <a:srgbClr val="2B2118"/>
+                </a:solidFill>
+                <a:latin typeface="Microsoft YaHei"/>
+              </a:rPr>
+              <a:t/>
+            </a:r>
+          </a:p>
+        </p:txBody>
+      </p:sp>
+      <p:sp>
+        <p:nvSpPr>
+          <p:cNvPr id="13" name="TextBox 12"/>
+          <p:cNvSpPr txBox="1"/>
+          <p:nvPr/>
+        </p:nvSpPr>
+        <p:spPr>
+          <a:xfrm>
+            <a:off x="640080" y="7927848"/>
+            <a:ext cx="10972800" cy="566928"/>
+          </a:xfrm>
+          <a:prstGeom prst="rect">
+            <a:avLst/>
+          </a:prstGeom>
+          <a:noFill/>
+        </p:spPr>
+        <p:txBody>
+          <a:bodyPr wrap="square" lIns="18288" rIns="18288" tIns="9144" bIns="9144" anchor="ctr">
+            <a:spAutoFit/>
+          </a:bodyPr>
+          <a:lstStyle/>
+          <a:p>
+            <a:pPr algn="ctr"/>
+            <a:r>
+              <a:rPr sz="1700" b="0" i="0">
+                <a:solidFill>
+                  <a:srgbClr val="2B2118"/>
+                </a:solidFill>
+                <a:latin typeface="Microsoft YaHei"/>
+              </a:rPr>
+              <a:t/>
+            </a:r>
+          </a:p>
+        </p:txBody>
+      </p:sp>
+      <p:sp>
+        <p:nvSpPr>
+          <p:cNvPr id="14" name="TextBox 13"/>
+          <p:cNvSpPr txBox="1"/>
+          <p:nvPr/>
+        </p:nvSpPr>
+        <p:spPr>
+          <a:xfrm>
+            <a:off x="640080" y="8951976"/>
+            <a:ext cx="10972800" cy="566928"/>
+          </a:xfrm>
+          <a:prstGeom prst="rect">
+            <a:avLst/>
+          </a:prstGeom>
+          <a:noFill/>
+        </p:spPr>
+        <p:txBody>
+          <a:bodyPr wrap="square" lIns="18288" rIns="18288" tIns="9144" bIns="9144" anchor="ctr">
+            <a:spAutoFit/>
+          </a:bodyPr>
+          <a:lstStyle/>
+          <a:p>
+            <a:pPr algn="ctr"/>
+            <a:r>
+              <a:rPr sz="1700" b="0" i="0">
+                <a:solidFill>
+                  <a:srgbClr val="2B2118"/>
+                </a:solidFill>
+                <a:latin typeface="Microsoft YaHei"/>
+              </a:rPr>
+              <a:t/>
+            </a:r>
+          </a:p>
+        </p:txBody>
+      </p:sp>
+      <p:sp>
+        <p:nvSpPr>
+          <p:cNvPr id="15" name="TextBox 14"/>
+          <p:cNvSpPr txBox="1"/>
+          <p:nvPr/>
+        </p:nvSpPr>
+        <p:spPr>
+          <a:xfrm>
+            <a:off x="640080" y="5577840"/>
             <a:ext cx="10972800" cy="548640"/>
           </a:xfrm>
           <a:prstGeom prst="rect">
@@ -4332,322 +4656,7 @@
           </a:bodyPr>
           <a:lstStyle/>
           <a:p>
-            <a:pPr algn="l"/>
-            <a:r>
-              <a:rPr sz="1700" b="1" i="0">
-                <a:solidFill>
-                  <a:srgbClr val="8C2D2D"/>
-                </a:solidFill>
-                <a:latin typeface="Microsoft YaHei"/>
-              </a:rPr>
-              <a:t/>
-            </a:r>
-          </a:p>
-        </p:txBody>
-      </p:sp>
-      <p:sp>
-        <p:nvSpPr>
-          <p:cNvPr id="8" name="TextBox 7"/>
-          <p:cNvSpPr txBox="1"/>
-          <p:nvPr/>
-        </p:nvSpPr>
-        <p:spPr>
-          <a:xfrm>
-            <a:off x="594360" y="2331720"/>
-            <a:ext cx="5394960" cy="548640"/>
-          </a:xfrm>
-          <a:prstGeom prst="rect">
-            <a:avLst/>
-          </a:prstGeom>
-          <a:noFill/>
-        </p:spPr>
-        <p:txBody>
-          <a:bodyPr wrap="square" lIns="18288" rIns="18288" tIns="9144" bIns="9144" anchor="ctr">
-            <a:spAutoFit/>
-          </a:bodyPr>
-          <a:lstStyle/>
-          <a:p>
-            <a:pPr algn="l"/>
-            <a:r>
-              <a:rPr sz="1600" b="0" i="0">
-                <a:solidFill>
-                  <a:srgbClr val="2B2118"/>
-                </a:solidFill>
-                <a:latin typeface="Microsoft YaHei"/>
-              </a:rPr>
-              <a:t/>
-            </a:r>
-          </a:p>
-        </p:txBody>
-      </p:sp>
-      <p:sp>
-        <p:nvSpPr>
-          <p:cNvPr id="9" name="TextBox 8"/>
-          <p:cNvSpPr txBox="1"/>
-          <p:nvPr/>
-        </p:nvSpPr>
-        <p:spPr>
-          <a:xfrm>
-            <a:off x="6263640" y="2331720"/>
-            <a:ext cx="5394960" cy="548640"/>
-          </a:xfrm>
-          <a:prstGeom prst="rect">
-            <a:avLst/>
-          </a:prstGeom>
-          <a:noFill/>
-        </p:spPr>
-        <p:txBody>
-          <a:bodyPr wrap="square" lIns="18288" rIns="18288" tIns="9144" bIns="9144" anchor="ctr">
-            <a:spAutoFit/>
-          </a:bodyPr>
-          <a:lstStyle/>
-          <a:p>
-            <a:pPr algn="l"/>
-            <a:r>
-              <a:rPr sz="1600" b="0" i="0">
-                <a:solidFill>
-                  <a:srgbClr val="2B2118"/>
-                </a:solidFill>
-                <a:latin typeface="Microsoft YaHei"/>
-              </a:rPr>
-              <a:t/>
-            </a:r>
-          </a:p>
-        </p:txBody>
-      </p:sp>
-      <p:sp>
-        <p:nvSpPr>
-          <p:cNvPr id="10" name="TextBox 9"/>
-          <p:cNvSpPr txBox="1"/>
-          <p:nvPr/>
-        </p:nvSpPr>
-        <p:spPr>
-          <a:xfrm>
-            <a:off x="594360" y="3017520"/>
-            <a:ext cx="5394960" cy="548640"/>
-          </a:xfrm>
-          <a:prstGeom prst="rect">
-            <a:avLst/>
-          </a:prstGeom>
-          <a:noFill/>
-        </p:spPr>
-        <p:txBody>
-          <a:bodyPr wrap="square" lIns="18288" rIns="18288" tIns="9144" bIns="9144" anchor="ctr">
-            <a:spAutoFit/>
-          </a:bodyPr>
-          <a:lstStyle/>
-          <a:p>
-            <a:pPr algn="l"/>
-            <a:r>
-              <a:rPr sz="1600" b="0" i="0">
-                <a:solidFill>
-                  <a:srgbClr val="2B2118"/>
-                </a:solidFill>
-                <a:latin typeface="Microsoft YaHei"/>
-              </a:rPr>
-              <a:t/>
-            </a:r>
-          </a:p>
-        </p:txBody>
-      </p:sp>
-      <p:sp>
-        <p:nvSpPr>
-          <p:cNvPr id="11" name="TextBox 10"/>
-          <p:cNvSpPr txBox="1"/>
-          <p:nvPr/>
-        </p:nvSpPr>
-        <p:spPr>
-          <a:xfrm>
-            <a:off x="6263640" y="3017520"/>
-            <a:ext cx="5394960" cy="548640"/>
-          </a:xfrm>
-          <a:prstGeom prst="rect">
-            <a:avLst/>
-          </a:prstGeom>
-          <a:noFill/>
-        </p:spPr>
-        <p:txBody>
-          <a:bodyPr wrap="square" lIns="18288" rIns="18288" tIns="9144" bIns="9144" anchor="ctr">
-            <a:spAutoFit/>
-          </a:bodyPr>
-          <a:lstStyle/>
-          <a:p>
-            <a:pPr algn="l"/>
-            <a:r>
-              <a:rPr sz="1600" b="0" i="0">
-                <a:solidFill>
-                  <a:srgbClr val="2B2118"/>
-                </a:solidFill>
-                <a:latin typeface="Microsoft YaHei"/>
-              </a:rPr>
-              <a:t/>
-            </a:r>
-          </a:p>
-        </p:txBody>
-      </p:sp>
-      <p:sp>
-        <p:nvSpPr>
-          <p:cNvPr id="12" name="TextBox 11"/>
-          <p:cNvSpPr txBox="1"/>
-          <p:nvPr/>
-        </p:nvSpPr>
-        <p:spPr>
-          <a:xfrm>
-            <a:off x="594360" y="3703320"/>
-            <a:ext cx="5394960" cy="548640"/>
-          </a:xfrm>
-          <a:prstGeom prst="rect">
-            <a:avLst/>
-          </a:prstGeom>
-          <a:noFill/>
-        </p:spPr>
-        <p:txBody>
-          <a:bodyPr wrap="square" lIns="18288" rIns="18288" tIns="9144" bIns="9144" anchor="ctr">
-            <a:spAutoFit/>
-          </a:bodyPr>
-          <a:lstStyle/>
-          <a:p>
-            <a:pPr algn="l"/>
-            <a:r>
-              <a:rPr sz="1600" b="0" i="0">
-                <a:solidFill>
-                  <a:srgbClr val="2B2118"/>
-                </a:solidFill>
-                <a:latin typeface="Microsoft YaHei"/>
-              </a:rPr>
-              <a:t/>
-            </a:r>
-          </a:p>
-        </p:txBody>
-      </p:sp>
-      <p:sp>
-        <p:nvSpPr>
-          <p:cNvPr id="13" name="TextBox 12"/>
-          <p:cNvSpPr txBox="1"/>
-          <p:nvPr/>
-        </p:nvSpPr>
-        <p:spPr>
-          <a:xfrm>
-            <a:off x="6263640" y="3703320"/>
-            <a:ext cx="5394960" cy="548640"/>
-          </a:xfrm>
-          <a:prstGeom prst="rect">
-            <a:avLst/>
-          </a:prstGeom>
-          <a:noFill/>
-        </p:spPr>
-        <p:txBody>
-          <a:bodyPr wrap="square" lIns="18288" rIns="18288" tIns="9144" bIns="9144" anchor="ctr">
-            <a:spAutoFit/>
-          </a:bodyPr>
-          <a:lstStyle/>
-          <a:p>
-            <a:pPr algn="l"/>
-            <a:r>
-              <a:rPr sz="1600" b="0" i="0">
-                <a:solidFill>
-                  <a:srgbClr val="2B2118"/>
-                </a:solidFill>
-                <a:latin typeface="Microsoft YaHei"/>
-              </a:rPr>
-              <a:t/>
-            </a:r>
-          </a:p>
-        </p:txBody>
-      </p:sp>
-      <p:sp>
-        <p:nvSpPr>
-          <p:cNvPr id="14" name="TextBox 13"/>
-          <p:cNvSpPr txBox="1"/>
-          <p:nvPr/>
-        </p:nvSpPr>
-        <p:spPr>
-          <a:xfrm>
-            <a:off x="594360" y="4389120"/>
-            <a:ext cx="5394960" cy="548640"/>
-          </a:xfrm>
-          <a:prstGeom prst="rect">
-            <a:avLst/>
-          </a:prstGeom>
-          <a:noFill/>
-        </p:spPr>
-        <p:txBody>
-          <a:bodyPr wrap="square" lIns="18288" rIns="18288" tIns="9144" bIns="9144" anchor="ctr">
-            <a:spAutoFit/>
-          </a:bodyPr>
-          <a:lstStyle/>
-          <a:p>
-            <a:pPr algn="l"/>
-            <a:r>
-              <a:rPr sz="1600" b="0" i="0">
-                <a:solidFill>
-                  <a:srgbClr val="2B2118"/>
-                </a:solidFill>
-                <a:latin typeface="Microsoft YaHei"/>
-              </a:rPr>
-              <a:t/>
-            </a:r>
-          </a:p>
-        </p:txBody>
-      </p:sp>
-      <p:sp>
-        <p:nvSpPr>
-          <p:cNvPr id="15" name="TextBox 14"/>
-          <p:cNvSpPr txBox="1"/>
-          <p:nvPr/>
-        </p:nvSpPr>
-        <p:spPr>
-          <a:xfrm>
-            <a:off x="6263640" y="4389120"/>
-            <a:ext cx="5394960" cy="548640"/>
-          </a:xfrm>
-          <a:prstGeom prst="rect">
-            <a:avLst/>
-          </a:prstGeom>
-          <a:noFill/>
-        </p:spPr>
-        <p:txBody>
-          <a:bodyPr wrap="square" lIns="18288" rIns="18288" tIns="9144" bIns="9144" anchor="ctr">
-            <a:spAutoFit/>
-          </a:bodyPr>
-          <a:lstStyle/>
-          <a:p>
-            <a:pPr algn="l"/>
-            <a:r>
-              <a:rPr sz="1600" b="0" i="0">
-                <a:solidFill>
-                  <a:srgbClr val="2B2118"/>
-                </a:solidFill>
-                <a:latin typeface="Microsoft YaHei"/>
-              </a:rPr>
-              <a:t/>
-            </a:r>
-          </a:p>
-        </p:txBody>
-      </p:sp>
-      <p:sp>
-        <p:nvSpPr>
-          <p:cNvPr id="16" name="TextBox 15"/>
-          <p:cNvSpPr txBox="1"/>
-          <p:nvPr/>
-        </p:nvSpPr>
-        <p:spPr>
-          <a:xfrm>
-            <a:off x="594360" y="5349240"/>
-            <a:ext cx="10972800" cy="685800"/>
-          </a:xfrm>
-          <a:prstGeom prst="rect">
-            <a:avLst/>
-          </a:prstGeom>
-          <a:noFill/>
-        </p:spPr>
-        <p:txBody>
-          <a:bodyPr wrap="square" lIns="18288" rIns="18288" tIns="9144" bIns="9144" anchor="ctr">
-            <a:spAutoFit/>
-          </a:bodyPr>
-          <a:lstStyle/>
-          <a:p>
-            <a:pPr algn="l"/>
+            <a:pPr algn="ctr"/>
             <a:r>
               <a:rPr sz="1500" b="0" i="1">
                 <a:solidFill>
@@ -4695,7 +4704,7 @@
         <p:spPr>
           <a:xfrm>
             <a:off x="0" y="0"/>
-            <a:ext cx="118872" cy="6858000"/>
+            <a:ext cx="164592" cy="6858000"/>
           </a:xfrm>
           <a:prstGeom prst="rect">
             <a:avLst/>
@@ -4808,7 +4817,7 @@
         </p:nvSpPr>
         <p:spPr>
           <a:xfrm>
-            <a:off x="548640" y="457200"/>
+            <a:off x="548640" y="502920"/>
             <a:ext cx="11064240" cy="777240"/>
           </a:xfrm>
           <a:prstGeom prst="rect">
@@ -4822,9 +4831,9 @@
           </a:bodyPr>
           <a:lstStyle/>
           <a:p>
-            <a:pPr algn="l"/>
-            <a:r>
-              <a:rPr sz="2800" b="1" i="0">
+            <a:pPr algn="ctr"/>
+            <a:r>
+              <a:rPr sz="3000" b="1" i="0">
                 <a:solidFill>
                   <a:srgbClr val="8C2D2D"/>
                 </a:solidFill>
@@ -4843,14 +4852,14 @@
         </p:nvSpPr>
         <p:spPr>
           <a:xfrm>
-            <a:off x="566928" y="1298448"/>
-            <a:ext cx="1234440" cy="82296"/>
+            <a:off x="5394960" y="1298448"/>
+            <a:ext cx="1371600" cy="82296"/>
           </a:xfrm>
           <a:prstGeom prst="rect">
             <a:avLst/>
           </a:prstGeom>
           <a:solidFill>
-            <a:srgbClr val="F0DFC8"/>
+            <a:srgbClr val="8C2D2D"/>
           </a:solidFill>
           <a:ln>
             <a:noFill/>
@@ -4887,7 +4896,7 @@
         </p:nvSpPr>
         <p:spPr>
           <a:xfrm>
-            <a:off x="914400" y="1691640"/>
+            <a:off x="914400" y="1737360"/>
             <a:ext cx="10332720" cy="457200"/>
           </a:xfrm>
           <a:prstGeom prst="rect">
@@ -4901,9 +4910,9 @@
           </a:bodyPr>
           <a:lstStyle/>
           <a:p>
-            <a:pPr algn="l"/>
-            <a:r>
-              <a:rPr sz="1500" b="1" i="0">
+            <a:pPr algn="ctr"/>
+            <a:r>
+              <a:rPr sz="1600" b="1" i="0">
                 <a:solidFill>
                   <a:srgbClr val="2B2118"/>
                 </a:solidFill>
@@ -4922,8 +4931,8 @@
         </p:nvSpPr>
         <p:spPr>
           <a:xfrm>
-            <a:off x="914400" y="2194560"/>
-            <a:ext cx="10332720" cy="411480"/>
+            <a:off x="914400" y="2286000"/>
+            <a:ext cx="10332720" cy="457200"/>
           </a:xfrm>
           <a:prstGeom prst="rect">
             <a:avLst/>
@@ -4936,9 +4945,9 @@
           </a:bodyPr>
           <a:lstStyle/>
           <a:p>
-            <a:pPr algn="l"/>
-            <a:r>
-              <a:rPr sz="1400" b="0" i="0">
+            <a:pPr algn="ctr"/>
+            <a:r>
+              <a:rPr sz="1500" b="0" i="0">
                 <a:solidFill>
                   <a:srgbClr val="8A7A63"/>
                 </a:solidFill>
@@ -4957,7 +4966,7 @@
         </p:nvSpPr>
         <p:spPr>
           <a:xfrm>
-            <a:off x="914400" y="3017520"/>
+            <a:off x="914400" y="3108960"/>
             <a:ext cx="10332720" cy="457200"/>
           </a:xfrm>
           <a:prstGeom prst="rect">
@@ -4971,9 +4980,9 @@
           </a:bodyPr>
           <a:lstStyle/>
           <a:p>
-            <a:pPr algn="l"/>
-            <a:r>
-              <a:rPr sz="1500" b="1" i="0">
+            <a:pPr algn="ctr"/>
+            <a:r>
+              <a:rPr sz="1600" b="1" i="0">
                 <a:solidFill>
                   <a:srgbClr val="2B2118"/>
                 </a:solidFill>
@@ -4992,8 +5001,8 @@
         </p:nvSpPr>
         <p:spPr>
           <a:xfrm>
-            <a:off x="914400" y="3520440"/>
-            <a:ext cx="10332720" cy="411480"/>
+            <a:off x="914400" y="3657600"/>
+            <a:ext cx="10332720" cy="457200"/>
           </a:xfrm>
           <a:prstGeom prst="rect">
             <a:avLst/>
@@ -5006,9 +5015,9 @@
           </a:bodyPr>
           <a:lstStyle/>
           <a:p>
-            <a:pPr algn="l"/>
-            <a:r>
-              <a:rPr sz="1400" b="0" i="0">
+            <a:pPr algn="ctr"/>
+            <a:r>
+              <a:rPr sz="1500" b="0" i="0">
                 <a:solidFill>
                   <a:srgbClr val="8A7A63"/>
                 </a:solidFill>
@@ -5027,7 +5036,7 @@
         </p:nvSpPr>
         <p:spPr>
           <a:xfrm>
-            <a:off x="914400" y="4343400"/>
+            <a:off x="914400" y="4480560"/>
             <a:ext cx="10332720" cy="457200"/>
           </a:xfrm>
           <a:prstGeom prst="rect">
@@ -5041,9 +5050,9 @@
           </a:bodyPr>
           <a:lstStyle/>
           <a:p>
-            <a:pPr algn="l"/>
-            <a:r>
-              <a:rPr sz="1500" b="1" i="0">
+            <a:pPr algn="ctr"/>
+            <a:r>
+              <a:rPr sz="1600" b="1" i="0">
                 <a:solidFill>
                   <a:srgbClr val="2B2118"/>
                 </a:solidFill>
@@ -5062,8 +5071,8 @@
         </p:nvSpPr>
         <p:spPr>
           <a:xfrm>
-            <a:off x="914400" y="4846320"/>
-            <a:ext cx="10332720" cy="411480"/>
+            <a:off x="914400" y="5029200"/>
+            <a:ext cx="10332720" cy="457200"/>
           </a:xfrm>
           <a:prstGeom prst="rect">
             <a:avLst/>
@@ -5076,9 +5085,9 @@
           </a:bodyPr>
           <a:lstStyle/>
           <a:p>
-            <a:pPr algn="l"/>
-            <a:r>
-              <a:rPr sz="1400" b="0" i="0">
+            <a:pPr algn="ctr"/>
+            <a:r>
+              <a:rPr sz="1500" b="0" i="0">
                 <a:solidFill>
                   <a:srgbClr val="8A7A63"/>
                 </a:solidFill>
@@ -5097,7 +5106,7 @@
         </p:nvSpPr>
         <p:spPr>
           <a:xfrm>
-            <a:off x="914400" y="5669280"/>
+            <a:off x="914400" y="5760720"/>
             <a:ext cx="10332720" cy="365760"/>
           </a:xfrm>
           <a:prstGeom prst="rect">
@@ -5111,9 +5120,9 @@
           </a:bodyPr>
           <a:lstStyle/>
           <a:p>
-            <a:pPr algn="l"/>
-            <a:r>
-              <a:rPr sz="1200" b="0" i="1">
+            <a:pPr algn="ctr"/>
+            <a:r>
+              <a:rPr sz="1300" b="0" i="1">
                 <a:solidFill>
                   <a:srgbClr val="8A7A63"/>
                 </a:solidFill>
@@ -5159,7 +5168,7 @@
         <p:spPr>
           <a:xfrm>
             <a:off x="0" y="0"/>
-            <a:ext cx="118872" cy="6858000"/>
+            <a:ext cx="164592" cy="6858000"/>
           </a:xfrm>
           <a:prstGeom prst="rect">
             <a:avLst/>
@@ -5272,7 +5281,7 @@
         </p:nvSpPr>
         <p:spPr>
           <a:xfrm>
-            <a:off x="548640" y="457200"/>
+            <a:off x="548640" y="502920"/>
             <a:ext cx="11064240" cy="777240"/>
           </a:xfrm>
           <a:prstGeom prst="rect">
@@ -5286,9 +5295,9 @@
           </a:bodyPr>
           <a:lstStyle/>
           <a:p>
-            <a:pPr algn="l"/>
-            <a:r>
-              <a:rPr sz="2800" b="1" i="0">
+            <a:pPr algn="ctr"/>
+            <a:r>
+              <a:rPr sz="3000" b="1" i="0">
                 <a:solidFill>
                   <a:srgbClr val="8C2D2D"/>
                 </a:solidFill>
@@ -5307,14 +5316,14 @@
         </p:nvSpPr>
         <p:spPr>
           <a:xfrm>
-            <a:off x="566928" y="1298448"/>
-            <a:ext cx="1234440" cy="82296"/>
+            <a:off x="5394960" y="1298448"/>
+            <a:ext cx="1371600" cy="82296"/>
           </a:xfrm>
           <a:prstGeom prst="rect">
             <a:avLst/>
           </a:prstGeom>
           <a:solidFill>
-            <a:srgbClr val="F0DFC8"/>
+            <a:srgbClr val="8C2D2D"/>
           </a:solidFill>
           <a:ln>
             <a:noFill/>
@@ -5352,7 +5361,7 @@
         <p:spPr>
           <a:xfrm>
             <a:off x="914400" y="1737360"/>
-            <a:ext cx="5486400" cy="457200"/>
+            <a:ext cx="10332720" cy="457200"/>
           </a:xfrm>
           <a:prstGeom prst="rect">
             <a:avLst/>
@@ -5365,9 +5374,9 @@
           </a:bodyPr>
           <a:lstStyle/>
           <a:p>
-            <a:pPr algn="l"/>
-            <a:r>
-              <a:rPr sz="1400" b="1" i="0">
+            <a:pPr algn="ctr"/>
+            <a:r>
+              <a:rPr sz="1500" b="1" i="0">
                 <a:solidFill>
                   <a:srgbClr val="8C2D2D"/>
                 </a:solidFill>
@@ -5386,7 +5395,7 @@
         </p:nvSpPr>
         <p:spPr>
           <a:xfrm>
-            <a:off x="914400" y="2286000"/>
+            <a:off x="914400" y="2331720"/>
             <a:ext cx="10332720" cy="914400"/>
           </a:xfrm>
           <a:prstGeom prst="rect">
@@ -5400,9 +5409,9 @@
           </a:bodyPr>
           <a:lstStyle/>
           <a:p>
-            <a:pPr algn="l"/>
-            <a:r>
-              <a:rPr sz="1700" b="1" i="0">
+            <a:pPr algn="ctr"/>
+            <a:r>
+              <a:rPr sz="1700" b="0" i="0">
                 <a:solidFill>
                   <a:srgbClr val="2B2118"/>
                 </a:solidFill>
@@ -5421,8 +5430,8 @@
         </p:nvSpPr>
         <p:spPr>
           <a:xfrm>
-            <a:off x="914400" y="3611880"/>
-            <a:ext cx="5029200" cy="685800"/>
+            <a:off x="914400" y="3520440"/>
+            <a:ext cx="10332720" cy="594360"/>
           </a:xfrm>
           <a:prstGeom prst="rect">
             <a:avLst/>
@@ -5435,9 +5444,9 @@
           </a:bodyPr>
           <a:lstStyle/>
           <a:p>
-            <a:pPr algn="l"/>
-            <a:r>
-              <a:rPr sz="1600" b="0" i="0">
+            <a:pPr algn="ctr"/>
+            <a:r>
+              <a:rPr sz="1700" b="0" i="0">
                 <a:solidFill>
                   <a:srgbClr val="2B2118"/>
                 </a:solidFill>
@@ -5456,8 +5465,8 @@
         </p:nvSpPr>
         <p:spPr>
           <a:xfrm>
-            <a:off x="6217920" y="3611880"/>
-            <a:ext cx="5029200" cy="685800"/>
+            <a:off x="914400" y="4617720"/>
+            <a:ext cx="10332720" cy="594360"/>
           </a:xfrm>
           <a:prstGeom prst="rect">
             <a:avLst/>
@@ -5470,9 +5479,9 @@
           </a:bodyPr>
           <a:lstStyle/>
           <a:p>
-            <a:pPr algn="l"/>
-            <a:r>
-              <a:rPr sz="1600" b="0" i="0">
+            <a:pPr algn="ctr"/>
+            <a:r>
+              <a:rPr sz="1700" b="0" i="0">
                 <a:solidFill>
                   <a:srgbClr val="2B2118"/>
                 </a:solidFill>
@@ -5491,8 +5500,8 @@
         </p:nvSpPr>
         <p:spPr>
           <a:xfrm>
-            <a:off x="914400" y="4434840"/>
-            <a:ext cx="5029200" cy="685800"/>
+            <a:off x="914400" y="5715000"/>
+            <a:ext cx="10332720" cy="594360"/>
           </a:xfrm>
           <a:prstGeom prst="rect">
             <a:avLst/>
@@ -5505,9 +5514,9 @@
           </a:bodyPr>
           <a:lstStyle/>
           <a:p>
-            <a:pPr algn="l"/>
-            <a:r>
-              <a:rPr sz="1600" b="0" i="0">
+            <a:pPr algn="ctr"/>
+            <a:r>
+              <a:rPr sz="1700" b="0" i="0">
                 <a:solidFill>
                   <a:srgbClr val="2B2118"/>
                 </a:solidFill>
@@ -5526,8 +5535,8 @@
         </p:nvSpPr>
         <p:spPr>
           <a:xfrm>
-            <a:off x="6217920" y="4434840"/>
-            <a:ext cx="5029200" cy="685800"/>
+            <a:off x="914400" y="6812280"/>
+            <a:ext cx="10332720" cy="594360"/>
           </a:xfrm>
           <a:prstGeom prst="rect">
             <a:avLst/>
@@ -5540,9 +5549,9 @@
           </a:bodyPr>
           <a:lstStyle/>
           <a:p>
-            <a:pPr algn="l"/>
-            <a:r>
-              <a:rPr sz="1600" b="0" i="0">
+            <a:pPr algn="ctr"/>
+            <a:r>
+              <a:rPr sz="1700" b="0" i="0">
                 <a:solidFill>
                   <a:srgbClr val="2B2118"/>
                 </a:solidFill>
@@ -5581,16 +5590,16 @@
       <p:grpSpPr/>
       <p:sp>
         <p:nvSpPr>
-          <p:cNvPr id="2" name="Oval 1"/>
+          <p:cNvPr id="2" name="Rectangle 1"/>
           <p:cNvSpPr/>
           <p:nvPr/>
         </p:nvSpPr>
         <p:spPr>
           <a:xfrm>
-            <a:off x="-1463040" y="4389120"/>
-            <a:ext cx="4572000" cy="4572000"/>
-          </a:xfrm>
-          <a:prstGeom prst="ellipse">
+            <a:off x="0" y="0"/>
+            <a:ext cx="274320" cy="6858000"/>
+          </a:xfrm>
+          <a:prstGeom prst="rect">
             <a:avLst/>
           </a:prstGeom>
           <a:solidFill>
@@ -5625,14 +5634,58 @@
       </p:sp>
       <p:sp>
         <p:nvSpPr>
-          <p:cNvPr id="3" name="TextBox 2"/>
-          <p:cNvSpPr txBox="1"/>
-          <p:nvPr/>
-        </p:nvSpPr>
-        <p:spPr>
-          <a:xfrm>
-            <a:off x="868680" y="6263640"/>
-            <a:ext cx="5486400" cy="365760"/>
+          <p:cNvPr id="3" name="Oval 2"/>
+          <p:cNvSpPr/>
+          <p:nvPr/>
+        </p:nvSpPr>
+        <p:spPr>
+          <a:xfrm>
+            <a:off x="10332720" y="-1097280"/>
+            <a:ext cx="2926080" cy="2926080"/>
+          </a:xfrm>
+          <a:prstGeom prst="ellipse">
+            <a:avLst/>
+          </a:prstGeom>
+          <a:solidFill>
+            <a:srgbClr val="F0DFC8"/>
+          </a:solidFill>
+          <a:ln>
+            <a:noFill/>
+          </a:ln>
+          <a:effectLst/>
+        </p:spPr>
+        <p:style>
+          <a:lnRef idx="1">
+            <a:schemeClr val="accent1"/>
+          </a:lnRef>
+          <a:fillRef idx="3">
+            <a:schemeClr val="accent1"/>
+          </a:fillRef>
+          <a:effectRef idx="2">
+            <a:schemeClr val="accent1"/>
+          </a:effectRef>
+          <a:fontRef idx="minor">
+            <a:schemeClr val="lt1"/>
+          </a:fontRef>
+        </p:style>
+        <p:txBody>
+          <a:bodyPr rtlCol="0" anchor="ctr"/>
+          <a:lstStyle/>
+          <a:p>
+            <a:pPr algn="ctr"/>
+          </a:p>
+        </p:txBody>
+      </p:sp>
+      <p:sp>
+        <p:nvSpPr>
+          <p:cNvPr id="4" name="TextBox 3"/>
+          <p:cNvSpPr txBox="1"/>
+          <p:nvPr/>
+        </p:nvSpPr>
+        <p:spPr>
+          <a:xfrm>
+            <a:off x="868680" y="6309360"/>
+            <a:ext cx="3657600" cy="365760"/>
           </a:xfrm>
           <a:prstGeom prst="rect">
             <a:avLst/>
@@ -5660,14 +5713,14 @@
       </p:sp>
       <p:sp>
         <p:nvSpPr>
-          <p:cNvPr id="4" name="TextBox 3"/>
-          <p:cNvSpPr txBox="1"/>
-          <p:nvPr/>
-        </p:nvSpPr>
-        <p:spPr>
-          <a:xfrm>
-            <a:off x="914400" y="2011680"/>
-            <a:ext cx="10332720" cy="1188720"/>
+          <p:cNvPr id="5" name="TextBox 4"/>
+          <p:cNvSpPr txBox="1"/>
+          <p:nvPr/>
+        </p:nvSpPr>
+        <p:spPr>
+          <a:xfrm>
+            <a:off x="1097280" y="2194560"/>
+            <a:ext cx="10058400" cy="1188720"/>
           </a:xfrm>
           <a:prstGeom prst="rect">
             <a:avLst/>
@@ -5680,7 +5733,7 @@
           </a:bodyPr>
           <a:lstStyle/>
           <a:p>
-            <a:pPr algn="l"/>
+            <a:pPr algn="ctr"/>
             <a:r>
               <a:rPr sz="3400" b="1" i="0">
                 <a:solidFill>
@@ -5695,14 +5748,14 @@
       </p:sp>
       <p:sp>
         <p:nvSpPr>
-          <p:cNvPr id="5" name="TextBox 4"/>
-          <p:cNvSpPr txBox="1"/>
-          <p:nvPr/>
-        </p:nvSpPr>
-        <p:spPr>
-          <a:xfrm>
-            <a:off x="914400" y="3474720"/>
-            <a:ext cx="10332720" cy="822960"/>
+          <p:cNvPr id="6" name="TextBox 5"/>
+          <p:cNvSpPr txBox="1"/>
+          <p:nvPr/>
+        </p:nvSpPr>
+        <p:spPr>
+          <a:xfrm>
+            <a:off x="1097280" y="3611880"/>
+            <a:ext cx="10058400" cy="731520"/>
           </a:xfrm>
           <a:prstGeom prst="rect">
             <a:avLst/>
@@ -5715,11 +5768,11 @@
           </a:bodyPr>
           <a:lstStyle/>
           <a:p>
-            <a:pPr algn="l"/>
+            <a:pPr algn="ctr"/>
             <a:r>
               <a:rPr sz="2000" b="0" i="0">
                 <a:solidFill>
-                  <a:srgbClr val="FFF6E8"/>
+                  <a:srgbClr val="F0DFC8"/>
                 </a:solidFill>
                 <a:latin typeface="Microsoft YaHei"/>
               </a:rPr>
@@ -5763,7 +5816,7 @@
         <p:spPr>
           <a:xfrm>
             <a:off x="0" y="0"/>
-            <a:ext cx="118872" cy="6858000"/>
+            <a:ext cx="164592" cy="6858000"/>
           </a:xfrm>
           <a:prstGeom prst="rect">
             <a:avLst/>
@@ -5876,7 +5929,7 @@
         </p:nvSpPr>
         <p:spPr>
           <a:xfrm>
-            <a:off x="548640" y="457200"/>
+            <a:off x="548640" y="502920"/>
             <a:ext cx="11064240" cy="777240"/>
           </a:xfrm>
           <a:prstGeom prst="rect">
@@ -5890,9 +5943,9 @@
           </a:bodyPr>
           <a:lstStyle/>
           <a:p>
-            <a:pPr algn="l"/>
-            <a:r>
-              <a:rPr sz="2800" b="1" i="0">
+            <a:pPr algn="ctr"/>
+            <a:r>
+              <a:rPr sz="3000" b="1" i="0">
                 <a:solidFill>
                   <a:srgbClr val="8C2D2D"/>
                 </a:solidFill>
@@ -5911,14 +5964,14 @@
         </p:nvSpPr>
         <p:spPr>
           <a:xfrm>
-            <a:off x="566928" y="1298448"/>
-            <a:ext cx="1234440" cy="82296"/>
+            <a:off x="5394960" y="1298448"/>
+            <a:ext cx="1371600" cy="82296"/>
           </a:xfrm>
           <a:prstGeom prst="rect">
             <a:avLst/>
           </a:prstGeom>
           <a:solidFill>
-            <a:srgbClr val="F0DFC8"/>
+            <a:srgbClr val="8C2D2D"/>
           </a:solidFill>
           <a:ln>
             <a:noFill/>
@@ -5955,8 +6008,8 @@
         </p:nvSpPr>
         <p:spPr>
           <a:xfrm>
-            <a:off x="594360" y="1645920"/>
-            <a:ext cx="10972800" cy="960120"/>
+            <a:off x="640080" y="1691640"/>
+            <a:ext cx="10972800" cy="914400"/>
           </a:xfrm>
           <a:prstGeom prst="rect">
             <a:avLst/>
@@ -5969,7 +6022,7 @@
           </a:bodyPr>
           <a:lstStyle/>
           <a:p>
-            <a:pPr algn="l"/>
+            <a:pPr algn="ctr"/>
             <a:r>
               <a:rPr sz="1800" b="1" i="0">
                 <a:solidFill>
@@ -5990,8 +6043,8 @@
         </p:nvSpPr>
         <p:spPr>
           <a:xfrm>
-            <a:off x="594360" y="2788920"/>
-            <a:ext cx="10972800" cy="566928"/>
+            <a:off x="640080" y="2834640"/>
+            <a:ext cx="10972800" cy="640080"/>
           </a:xfrm>
           <a:prstGeom prst="rect">
             <a:avLst/>
@@ -6004,9 +6057,9 @@
           </a:bodyPr>
           <a:lstStyle/>
           <a:p>
-            <a:pPr algn="l"/>
-            <a:r>
-              <a:rPr sz="1600" b="0" i="0">
+            <a:pPr algn="ctr"/>
+            <a:r>
+              <a:rPr sz="1700" b="0" i="0">
                 <a:solidFill>
                   <a:srgbClr val="2B2118"/>
                 </a:solidFill>
@@ -6025,8 +6078,8 @@
         </p:nvSpPr>
         <p:spPr>
           <a:xfrm>
-            <a:off x="594360" y="3447288"/>
-            <a:ext cx="10972800" cy="566928"/>
+            <a:off x="640080" y="4023360"/>
+            <a:ext cx="10972800" cy="640080"/>
           </a:xfrm>
           <a:prstGeom prst="rect">
             <a:avLst/>
@@ -6039,9 +6092,9 @@
           </a:bodyPr>
           <a:lstStyle/>
           <a:p>
-            <a:pPr algn="l"/>
-            <a:r>
-              <a:rPr sz="1600" b="0" i="0">
+            <a:pPr algn="ctr"/>
+            <a:r>
+              <a:rPr sz="1700" b="0" i="0">
                 <a:solidFill>
                   <a:srgbClr val="2B2118"/>
                 </a:solidFill>
@@ -6060,8 +6113,8 @@
         </p:nvSpPr>
         <p:spPr>
           <a:xfrm>
-            <a:off x="594360" y="4105656"/>
-            <a:ext cx="10972800" cy="566928"/>
+            <a:off x="640080" y="5212079"/>
+            <a:ext cx="10972800" cy="640080"/>
           </a:xfrm>
           <a:prstGeom prst="rect">
             <a:avLst/>
@@ -6074,9 +6127,9 @@
           </a:bodyPr>
           <a:lstStyle/>
           <a:p>
-            <a:pPr algn="l"/>
-            <a:r>
-              <a:rPr sz="1600" b="0" i="0">
+            <a:pPr algn="ctr"/>
+            <a:r>
+              <a:rPr sz="1700" b="0" i="0">
                 <a:solidFill>
                   <a:srgbClr val="2B2118"/>
                 </a:solidFill>
@@ -6095,8 +6148,8 @@
         </p:nvSpPr>
         <p:spPr>
           <a:xfrm>
-            <a:off x="594360" y="4764024"/>
-            <a:ext cx="10972800" cy="566928"/>
+            <a:off x="640080" y="6400800"/>
+            <a:ext cx="10972800" cy="640080"/>
           </a:xfrm>
           <a:prstGeom prst="rect">
             <a:avLst/>
@@ -6109,9 +6162,9 @@
           </a:bodyPr>
           <a:lstStyle/>
           <a:p>
-            <a:pPr algn="l"/>
-            <a:r>
-              <a:rPr sz="1600" b="0" i="0">
+            <a:pPr algn="ctr"/>
+            <a:r>
+              <a:rPr sz="1700" b="0" i="0">
                 <a:solidFill>
                   <a:srgbClr val="2B2118"/>
                 </a:solidFill>
@@ -6130,8 +6183,8 @@
         </p:nvSpPr>
         <p:spPr>
           <a:xfrm>
-            <a:off x="594360" y="5422392"/>
-            <a:ext cx="10972800" cy="566928"/>
+            <a:off x="640080" y="7589519"/>
+            <a:ext cx="10972800" cy="640080"/>
           </a:xfrm>
           <a:prstGeom prst="rect">
             <a:avLst/>
@@ -6144,9 +6197,9 @@
           </a:bodyPr>
           <a:lstStyle/>
           <a:p>
-            <a:pPr algn="l"/>
-            <a:r>
-              <a:rPr sz="1600" b="0" i="0">
+            <a:pPr algn="ctr"/>
+            <a:r>
+              <a:rPr sz="1700" b="0" i="0">
                 <a:solidFill>
                   <a:srgbClr val="2B2118"/>
                 </a:solidFill>
@@ -6192,7 +6245,7 @@
         <p:spPr>
           <a:xfrm>
             <a:off x="0" y="0"/>
-            <a:ext cx="118872" cy="6858000"/>
+            <a:ext cx="164592" cy="6858000"/>
           </a:xfrm>
           <a:prstGeom prst="rect">
             <a:avLst/>
@@ -6305,7 +6358,7 @@
         </p:nvSpPr>
         <p:spPr>
           <a:xfrm>
-            <a:off x="548640" y="457200"/>
+            <a:off x="548640" y="502920"/>
             <a:ext cx="11064240" cy="777240"/>
           </a:xfrm>
           <a:prstGeom prst="rect">
@@ -6319,9 +6372,9 @@
           </a:bodyPr>
           <a:lstStyle/>
           <a:p>
-            <a:pPr algn="l"/>
-            <a:r>
-              <a:rPr sz="2800" b="1" i="0">
+            <a:pPr algn="ctr"/>
+            <a:r>
+              <a:rPr sz="3000" b="1" i="0">
                 <a:solidFill>
                   <a:srgbClr val="8C2D2D"/>
                 </a:solidFill>
@@ -6340,14 +6393,14 @@
         </p:nvSpPr>
         <p:spPr>
           <a:xfrm>
-            <a:off x="566928" y="1298448"/>
-            <a:ext cx="1234440" cy="82296"/>
+            <a:off x="5394960" y="1298448"/>
+            <a:ext cx="1371600" cy="82296"/>
           </a:xfrm>
           <a:prstGeom prst="rect">
             <a:avLst/>
           </a:prstGeom>
           <a:solidFill>
-            <a:srgbClr val="F0DFC8"/>
+            <a:srgbClr val="8C2D2D"/>
           </a:solidFill>
           <a:ln>
             <a:noFill/>
@@ -6384,7 +6437,7 @@
         </p:nvSpPr>
         <p:spPr>
           <a:xfrm>
-            <a:off x="594360" y="1737360"/>
+            <a:off x="640080" y="1737360"/>
             <a:ext cx="10972800" cy="640080"/>
           </a:xfrm>
           <a:prstGeom prst="rect">
@@ -6398,7 +6451,7 @@
           </a:bodyPr>
           <a:lstStyle/>
           <a:p>
-            <a:pPr algn="l"/>
+            <a:pPr algn="ctr"/>
             <a:r>
               <a:rPr sz="1800" b="1" i="0">
                 <a:solidFill>
@@ -6419,8 +6472,8 @@
         </p:nvSpPr>
         <p:spPr>
           <a:xfrm>
-            <a:off x="594360" y="2560320"/>
-            <a:ext cx="10972800" cy="731520"/>
+            <a:off x="640080" y="2560320"/>
+            <a:ext cx="10972800" cy="777240"/>
           </a:xfrm>
           <a:prstGeom prst="rect">
             <a:avLst/>
@@ -6433,9 +6486,9 @@
           </a:bodyPr>
           <a:lstStyle/>
           <a:p>
-            <a:pPr algn="l"/>
-            <a:r>
-              <a:rPr sz="1600" b="0" i="0">
+            <a:pPr algn="ctr"/>
+            <a:r>
+              <a:rPr sz="1700" b="0" i="0">
                 <a:solidFill>
                   <a:srgbClr val="2B2118"/>
                 </a:solidFill>
@@ -6454,8 +6507,8 @@
         </p:nvSpPr>
         <p:spPr>
           <a:xfrm>
-            <a:off x="594360" y="3429000"/>
-            <a:ext cx="10972800" cy="731520"/>
+            <a:off x="640080" y="4023360"/>
+            <a:ext cx="10972800" cy="777240"/>
           </a:xfrm>
           <a:prstGeom prst="rect">
             <a:avLst/>
@@ -6468,9 +6521,9 @@
           </a:bodyPr>
           <a:lstStyle/>
           <a:p>
-            <a:pPr algn="l"/>
-            <a:r>
-              <a:rPr sz="1600" b="0" i="0">
+            <a:pPr algn="ctr"/>
+            <a:r>
+              <a:rPr sz="1700" b="0" i="0">
                 <a:solidFill>
                   <a:srgbClr val="2B2118"/>
                 </a:solidFill>
@@ -6489,8 +6542,8 @@
         </p:nvSpPr>
         <p:spPr>
           <a:xfrm>
-            <a:off x="594360" y="4297680"/>
-            <a:ext cx="10972800" cy="731520"/>
+            <a:off x="640080" y="5486400"/>
+            <a:ext cx="10972800" cy="777240"/>
           </a:xfrm>
           <a:prstGeom prst="rect">
             <a:avLst/>
@@ -6503,9 +6556,9 @@
           </a:bodyPr>
           <a:lstStyle/>
           <a:p>
-            <a:pPr algn="l"/>
-            <a:r>
-              <a:rPr sz="1600" b="0" i="0">
+            <a:pPr algn="ctr"/>
+            <a:r>
+              <a:rPr sz="1700" b="0" i="0">
                 <a:solidFill>
                   <a:srgbClr val="2B2118"/>
                 </a:solidFill>
@@ -6524,8 +6577,8 @@
         </p:nvSpPr>
         <p:spPr>
           <a:xfrm>
-            <a:off x="594360" y="5166360"/>
-            <a:ext cx="10972800" cy="731520"/>
+            <a:off x="640080" y="6949440"/>
+            <a:ext cx="10972800" cy="777240"/>
           </a:xfrm>
           <a:prstGeom prst="rect">
             <a:avLst/>
@@ -6538,9 +6591,9 @@
           </a:bodyPr>
           <a:lstStyle/>
           <a:p>
-            <a:pPr algn="l"/>
-            <a:r>
-              <a:rPr sz="1600" b="0" i="0">
+            <a:pPr algn="ctr"/>
+            <a:r>
+              <a:rPr sz="1700" b="0" i="0">
                 <a:solidFill>
                   <a:srgbClr val="2B2118"/>
                 </a:solidFill>
@@ -6586,7 +6639,7 @@
         <p:spPr>
           <a:xfrm>
             <a:off x="0" y="0"/>
-            <a:ext cx="118872" cy="6858000"/>
+            <a:ext cx="164592" cy="6858000"/>
           </a:xfrm>
           <a:prstGeom prst="rect">
             <a:avLst/>
@@ -6699,7 +6752,7 @@
         </p:nvSpPr>
         <p:spPr>
           <a:xfrm>
-            <a:off x="548640" y="457200"/>
+            <a:off x="548640" y="502920"/>
             <a:ext cx="11064240" cy="777240"/>
           </a:xfrm>
           <a:prstGeom prst="rect">
@@ -6713,9 +6766,9 @@
           </a:bodyPr>
           <a:lstStyle/>
           <a:p>
-            <a:pPr algn="l"/>
-            <a:r>
-              <a:rPr sz="2800" b="1" i="0">
+            <a:pPr algn="ctr"/>
+            <a:r>
+              <a:rPr sz="3000" b="1" i="0">
                 <a:solidFill>
                   <a:srgbClr val="8C2D2D"/>
                 </a:solidFill>
@@ -6734,14 +6787,14 @@
         </p:nvSpPr>
         <p:spPr>
           <a:xfrm>
-            <a:off x="566928" y="1298448"/>
-            <a:ext cx="1234440" cy="82296"/>
+            <a:off x="5394960" y="1298448"/>
+            <a:ext cx="1371600" cy="82296"/>
           </a:xfrm>
           <a:prstGeom prst="rect">
             <a:avLst/>
           </a:prstGeom>
           <a:solidFill>
-            <a:srgbClr val="F0DFC8"/>
+            <a:srgbClr val="8C2D2D"/>
           </a:solidFill>
           <a:ln>
             <a:noFill/>
@@ -6778,8 +6831,8 @@
         </p:nvSpPr>
         <p:spPr>
           <a:xfrm>
-            <a:off x="594360" y="1737360"/>
-            <a:ext cx="10972800" cy="640080"/>
+            <a:off x="640080" y="1828800"/>
+            <a:ext cx="10972800" cy="777240"/>
           </a:xfrm>
           <a:prstGeom prst="rect">
             <a:avLst/>
@@ -6792,11 +6845,11 @@
           </a:bodyPr>
           <a:lstStyle/>
           <a:p>
-            <a:pPr algn="l"/>
-            <a:r>
-              <a:rPr sz="1800" b="1" i="0">
-                <a:solidFill>
-                  <a:srgbClr val="8C2D2D"/>
+            <a:pPr algn="ctr"/>
+            <a:r>
+              <a:rPr sz="1700" b="0" i="0">
+                <a:solidFill>
+                  <a:srgbClr val="2B2118"/>
                 </a:solidFill>
                 <a:latin typeface="Microsoft YaHei"/>
               </a:rPr>
@@ -6813,8 +6866,8 @@
         </p:nvSpPr>
         <p:spPr>
           <a:xfrm>
-            <a:off x="594360" y="2606040"/>
-            <a:ext cx="5394960" cy="685800"/>
+            <a:off x="640080" y="3291840"/>
+            <a:ext cx="10972800" cy="777240"/>
           </a:xfrm>
           <a:prstGeom prst="rect">
             <a:avLst/>
@@ -6827,9 +6880,9 @@
           </a:bodyPr>
           <a:lstStyle/>
           <a:p>
-            <a:pPr algn="l"/>
-            <a:r>
-              <a:rPr sz="1600" b="0" i="0">
+            <a:pPr algn="ctr"/>
+            <a:r>
+              <a:rPr sz="1700" b="0" i="0">
                 <a:solidFill>
                   <a:srgbClr val="2B2118"/>
                 </a:solidFill>
@@ -6848,8 +6901,8 @@
         </p:nvSpPr>
         <p:spPr>
           <a:xfrm>
-            <a:off x="6263640" y="2606040"/>
-            <a:ext cx="5394960" cy="685800"/>
+            <a:off x="640080" y="4754880"/>
+            <a:ext cx="10972800" cy="777240"/>
           </a:xfrm>
           <a:prstGeom prst="rect">
             <a:avLst/>
@@ -6862,9 +6915,9 @@
           </a:bodyPr>
           <a:lstStyle/>
           <a:p>
-            <a:pPr algn="l"/>
-            <a:r>
-              <a:rPr sz="1600" b="0" i="0">
+            <a:pPr algn="ctr"/>
+            <a:r>
+              <a:rPr sz="1700" b="0" i="0">
                 <a:solidFill>
                   <a:srgbClr val="2B2118"/>
                 </a:solidFill>
@@ -6883,8 +6936,8 @@
         </p:nvSpPr>
         <p:spPr>
           <a:xfrm>
-            <a:off x="594360" y="3474720"/>
-            <a:ext cx="5394960" cy="685800"/>
+            <a:off x="640080" y="6217920"/>
+            <a:ext cx="10972800" cy="777240"/>
           </a:xfrm>
           <a:prstGeom prst="rect">
             <a:avLst/>
@@ -6897,9 +6950,9 @@
           </a:bodyPr>
           <a:lstStyle/>
           <a:p>
-            <a:pPr algn="l"/>
-            <a:r>
-              <a:rPr sz="1600" b="0" i="0">
+            <a:pPr algn="ctr"/>
+            <a:r>
+              <a:rPr sz="1700" b="0" i="0">
                 <a:solidFill>
                   <a:srgbClr val="2B2118"/>
                 </a:solidFill>
@@ -6918,8 +6971,8 @@
         </p:nvSpPr>
         <p:spPr>
           <a:xfrm>
-            <a:off x="6263640" y="3474720"/>
-            <a:ext cx="5394960" cy="685800"/>
+            <a:off x="640080" y="7680960"/>
+            <a:ext cx="10972800" cy="777240"/>
           </a:xfrm>
           <a:prstGeom prst="rect">
             <a:avLst/>
@@ -6932,9 +6985,9 @@
           </a:bodyPr>
           <a:lstStyle/>
           <a:p>
-            <a:pPr algn="l"/>
-            <a:r>
-              <a:rPr sz="1600" b="0" i="0">
+            <a:pPr algn="ctr"/>
+            <a:r>
+              <a:rPr sz="1700" b="0" i="0">
                 <a:solidFill>
                   <a:srgbClr val="2B2118"/>
                 </a:solidFill>
@@ -6980,7 +7033,7 @@
         <p:spPr>
           <a:xfrm>
             <a:off x="0" y="0"/>
-            <a:ext cx="118872" cy="6858000"/>
+            <a:ext cx="164592" cy="6858000"/>
           </a:xfrm>
           <a:prstGeom prst="rect">
             <a:avLst/>
@@ -7093,7 +7146,7 @@
         </p:nvSpPr>
         <p:spPr>
           <a:xfrm>
-            <a:off x="548640" y="457200"/>
+            <a:off x="548640" y="502920"/>
             <a:ext cx="11064240" cy="777240"/>
           </a:xfrm>
           <a:prstGeom prst="rect">
@@ -7107,9 +7160,9 @@
           </a:bodyPr>
           <a:lstStyle/>
           <a:p>
-            <a:pPr algn="l"/>
-            <a:r>
-              <a:rPr sz="2800" b="1" i="0">
+            <a:pPr algn="ctr"/>
+            <a:r>
+              <a:rPr sz="3000" b="1" i="0">
                 <a:solidFill>
                   <a:srgbClr val="8C2D2D"/>
                 </a:solidFill>
@@ -7128,14 +7181,14 @@
         </p:nvSpPr>
         <p:spPr>
           <a:xfrm>
-            <a:off x="566928" y="1298448"/>
-            <a:ext cx="1234440" cy="82296"/>
+            <a:off x="5394960" y="1298448"/>
+            <a:ext cx="1371600" cy="82296"/>
           </a:xfrm>
           <a:prstGeom prst="rect">
             <a:avLst/>
           </a:prstGeom>
           <a:solidFill>
-            <a:srgbClr val="F0DFC8"/>
+            <a:srgbClr val="8C2D2D"/>
           </a:solidFill>
           <a:ln>
             <a:noFill/>
@@ -7172,7 +7225,7 @@
         </p:nvSpPr>
         <p:spPr>
           <a:xfrm>
-            <a:off x="594360" y="1645920"/>
+            <a:off x="640080" y="1691640"/>
             <a:ext cx="10972800" cy="914400"/>
           </a:xfrm>
           <a:prstGeom prst="rect">
@@ -7186,7 +7239,7 @@
           </a:bodyPr>
           <a:lstStyle/>
           <a:p>
-            <a:pPr algn="l"/>
+            <a:pPr algn="ctr"/>
             <a:r>
               <a:rPr sz="1800" b="1" i="0">
                 <a:solidFill>
@@ -7207,8 +7260,8 @@
         </p:nvSpPr>
         <p:spPr>
           <a:xfrm>
-            <a:off x="594360" y="2743200"/>
-            <a:ext cx="5394960" cy="594360"/>
+            <a:off x="640080" y="2834640"/>
+            <a:ext cx="10972800" cy="566928"/>
           </a:xfrm>
           <a:prstGeom prst="rect">
             <a:avLst/>
@@ -7221,9 +7274,9 @@
           </a:bodyPr>
           <a:lstStyle/>
           <a:p>
-            <a:pPr algn="l"/>
-            <a:r>
-              <a:rPr sz="1600" b="0" i="0">
+            <a:pPr algn="ctr"/>
+            <a:r>
+              <a:rPr sz="1700" b="0" i="0">
                 <a:solidFill>
                   <a:srgbClr val="2B2118"/>
                 </a:solidFill>
@@ -7242,8 +7295,8 @@
         </p:nvSpPr>
         <p:spPr>
           <a:xfrm>
-            <a:off x="6263640" y="2743200"/>
-            <a:ext cx="5394960" cy="594360"/>
+            <a:off x="640080" y="3904487"/>
+            <a:ext cx="10972800" cy="566928"/>
           </a:xfrm>
           <a:prstGeom prst="rect">
             <a:avLst/>
@@ -7256,9 +7309,9 @@
           </a:bodyPr>
           <a:lstStyle/>
           <a:p>
-            <a:pPr algn="l"/>
-            <a:r>
-              <a:rPr sz="1600" b="0" i="0">
+            <a:pPr algn="ctr"/>
+            <a:r>
+              <a:rPr sz="1700" b="0" i="0">
                 <a:solidFill>
                   <a:srgbClr val="2B2118"/>
                 </a:solidFill>
@@ -7277,8 +7330,8 @@
         </p:nvSpPr>
         <p:spPr>
           <a:xfrm>
-            <a:off x="594360" y="3474720"/>
-            <a:ext cx="5394960" cy="594360"/>
+            <a:off x="640080" y="4974336"/>
+            <a:ext cx="10972800" cy="566928"/>
           </a:xfrm>
           <a:prstGeom prst="rect">
             <a:avLst/>
@@ -7291,9 +7344,9 @@
           </a:bodyPr>
           <a:lstStyle/>
           <a:p>
-            <a:pPr algn="l"/>
-            <a:r>
-              <a:rPr sz="1600" b="0" i="0">
+            <a:pPr algn="ctr"/>
+            <a:r>
+              <a:rPr sz="1700" b="0" i="0">
                 <a:solidFill>
                   <a:srgbClr val="2B2118"/>
                 </a:solidFill>
@@ -7312,8 +7365,8 @@
         </p:nvSpPr>
         <p:spPr>
           <a:xfrm>
-            <a:off x="6263640" y="3474720"/>
-            <a:ext cx="5394960" cy="594360"/>
+            <a:off x="640080" y="6044183"/>
+            <a:ext cx="10972800" cy="566928"/>
           </a:xfrm>
           <a:prstGeom prst="rect">
             <a:avLst/>
@@ -7326,9 +7379,9 @@
           </a:bodyPr>
           <a:lstStyle/>
           <a:p>
-            <a:pPr algn="l"/>
-            <a:r>
-              <a:rPr sz="1600" b="0" i="0">
+            <a:pPr algn="ctr"/>
+            <a:r>
+              <a:rPr sz="1700" b="0" i="0">
                 <a:solidFill>
                   <a:srgbClr val="2B2118"/>
                 </a:solidFill>
@@ -7347,8 +7400,8 @@
         </p:nvSpPr>
         <p:spPr>
           <a:xfrm>
-            <a:off x="594360" y="4206240"/>
-            <a:ext cx="5394960" cy="594360"/>
+            <a:off x="640080" y="7114031"/>
+            <a:ext cx="10972800" cy="566928"/>
           </a:xfrm>
           <a:prstGeom prst="rect">
             <a:avLst/>
@@ -7361,9 +7414,9 @@
           </a:bodyPr>
           <a:lstStyle/>
           <a:p>
-            <a:pPr algn="l"/>
-            <a:r>
-              <a:rPr sz="1600" b="0" i="0">
+            <a:pPr algn="ctr"/>
+            <a:r>
+              <a:rPr sz="1700" b="0" i="0">
                 <a:solidFill>
                   <a:srgbClr val="2B2118"/>
                 </a:solidFill>
@@ -7382,8 +7435,8 @@
         </p:nvSpPr>
         <p:spPr>
           <a:xfrm>
-            <a:off x="6263640" y="4206240"/>
-            <a:ext cx="5394960" cy="594360"/>
+            <a:off x="640080" y="8183879"/>
+            <a:ext cx="10972800" cy="566928"/>
           </a:xfrm>
           <a:prstGeom prst="rect">
             <a:avLst/>
@@ -7396,9 +7449,9 @@
           </a:bodyPr>
           <a:lstStyle/>
           <a:p>
-            <a:pPr algn="l"/>
-            <a:r>
-              <a:rPr sz="1600" b="0" i="0">
+            <a:pPr algn="ctr"/>
+            <a:r>
+              <a:rPr sz="1700" b="0" i="0">
                 <a:solidFill>
                   <a:srgbClr val="2B2118"/>
                 </a:solidFill>
@@ -7444,7 +7497,7 @@
         <p:spPr>
           <a:xfrm>
             <a:off x="0" y="0"/>
-            <a:ext cx="118872" cy="6858000"/>
+            <a:ext cx="164592" cy="6858000"/>
           </a:xfrm>
           <a:prstGeom prst="rect">
             <a:avLst/>
@@ -7557,7 +7610,7 @@
         </p:nvSpPr>
         <p:spPr>
           <a:xfrm>
-            <a:off x="548640" y="457200"/>
+            <a:off x="548640" y="502920"/>
             <a:ext cx="11064240" cy="777240"/>
           </a:xfrm>
           <a:prstGeom prst="rect">
@@ -7571,9 +7624,9 @@
           </a:bodyPr>
           <a:lstStyle/>
           <a:p>
-            <a:pPr algn="l"/>
-            <a:r>
-              <a:rPr sz="2800" b="1" i="0">
+            <a:pPr algn="ctr"/>
+            <a:r>
+              <a:rPr sz="3000" b="1" i="0">
                 <a:solidFill>
                   <a:srgbClr val="8C2D2D"/>
                 </a:solidFill>
@@ -7592,14 +7645,14 @@
         </p:nvSpPr>
         <p:spPr>
           <a:xfrm>
-            <a:off x="566928" y="1298448"/>
-            <a:ext cx="1234440" cy="82296"/>
+            <a:off x="5394960" y="1298448"/>
+            <a:ext cx="1371600" cy="82296"/>
           </a:xfrm>
           <a:prstGeom prst="rect">
             <a:avLst/>
           </a:prstGeom>
           <a:solidFill>
-            <a:srgbClr val="F0DFC8"/>
+            <a:srgbClr val="8C2D2D"/>
           </a:solidFill>
           <a:ln>
             <a:noFill/>
@@ -7636,8 +7689,8 @@
         </p:nvSpPr>
         <p:spPr>
           <a:xfrm>
-            <a:off x="594360" y="1645920"/>
-            <a:ext cx="3200400" cy="457200"/>
+            <a:off x="640080" y="1691640"/>
+            <a:ext cx="10972800" cy="457200"/>
           </a:xfrm>
           <a:prstGeom prst="rect">
             <a:avLst/>
@@ -7650,9 +7703,9 @@
           </a:bodyPr>
           <a:lstStyle/>
           <a:p>
-            <a:pPr algn="l"/>
-            <a:r>
-              <a:rPr sz="1400" b="1" i="0">
+            <a:pPr algn="ctr"/>
+            <a:r>
+              <a:rPr sz="1500" b="1" i="0">
                 <a:solidFill>
                   <a:srgbClr val="8C2D2D"/>
                 </a:solidFill>
@@ -7671,7 +7724,7 @@
         </p:nvSpPr>
         <p:spPr>
           <a:xfrm>
-            <a:off x="594360" y="2194560"/>
+            <a:off x="640080" y="2240280"/>
             <a:ext cx="10972800" cy="731520"/>
           </a:xfrm>
           <a:prstGeom prst="rect">
@@ -7685,7 +7738,7 @@
           </a:bodyPr>
           <a:lstStyle/>
           <a:p>
-            <a:pPr algn="l"/>
+            <a:pPr algn="ctr"/>
             <a:r>
               <a:rPr sz="1800" b="1" i="0">
                 <a:solidFill>
@@ -7706,8 +7759,8 @@
         </p:nvSpPr>
         <p:spPr>
           <a:xfrm>
-            <a:off x="594360" y="3108960"/>
-            <a:ext cx="10972800" cy="594360"/>
+            <a:off x="640080" y="3154680"/>
+            <a:ext cx="10972800" cy="566928"/>
           </a:xfrm>
           <a:prstGeom prst="rect">
             <a:avLst/>
@@ -7720,9 +7773,9 @@
           </a:bodyPr>
           <a:lstStyle/>
           <a:p>
-            <a:pPr algn="l"/>
-            <a:r>
-              <a:rPr sz="1600" b="0" i="0">
+            <a:pPr algn="ctr"/>
+            <a:r>
+              <a:rPr sz="1700" b="0" i="0">
                 <a:solidFill>
                   <a:srgbClr val="2B2118"/>
                 </a:solidFill>
@@ -7741,8 +7794,8 @@
         </p:nvSpPr>
         <p:spPr>
           <a:xfrm>
-            <a:off x="594360" y="3822191"/>
-            <a:ext cx="10972800" cy="594360"/>
+            <a:off x="640080" y="4361688"/>
+            <a:ext cx="10972800" cy="566928"/>
           </a:xfrm>
           <a:prstGeom prst="rect">
             <a:avLst/>
@@ -7755,9 +7808,9 @@
           </a:bodyPr>
           <a:lstStyle/>
           <a:p>
-            <a:pPr algn="l"/>
-            <a:r>
-              <a:rPr sz="1600" b="0" i="0">
+            <a:pPr algn="ctr"/>
+            <a:r>
+              <a:rPr sz="1700" b="0" i="0">
                 <a:solidFill>
                   <a:srgbClr val="2B2118"/>
                 </a:solidFill>
@@ -7776,8 +7829,8 @@
         </p:nvSpPr>
         <p:spPr>
           <a:xfrm>
-            <a:off x="594360" y="4535424"/>
-            <a:ext cx="10972800" cy="594360"/>
+            <a:off x="640080" y="5568696"/>
+            <a:ext cx="10972800" cy="566928"/>
           </a:xfrm>
           <a:prstGeom prst="rect">
             <a:avLst/>
@@ -7790,9 +7843,9 @@
           </a:bodyPr>
           <a:lstStyle/>
           <a:p>
-            <a:pPr algn="l"/>
-            <a:r>
-              <a:rPr sz="1600" b="0" i="0">
+            <a:pPr algn="ctr"/>
+            <a:r>
+              <a:rPr sz="1700" b="0" i="0">
                 <a:solidFill>
                   <a:srgbClr val="2B2118"/>
                 </a:solidFill>
@@ -7811,8 +7864,8 @@
         </p:nvSpPr>
         <p:spPr>
           <a:xfrm>
-            <a:off x="594360" y="5248656"/>
-            <a:ext cx="10972800" cy="594360"/>
+            <a:off x="640080" y="6775704"/>
+            <a:ext cx="10972800" cy="566928"/>
           </a:xfrm>
           <a:prstGeom prst="rect">
             <a:avLst/>
@@ -7825,9 +7878,9 @@
           </a:bodyPr>
           <a:lstStyle/>
           <a:p>
-            <a:pPr algn="l"/>
-            <a:r>
-              <a:rPr sz="1600" b="0" i="0">
+            <a:pPr algn="ctr"/>
+            <a:r>
+              <a:rPr sz="1700" b="0" i="0">
                 <a:solidFill>
                   <a:srgbClr val="2B2118"/>
                 </a:solidFill>
@@ -7873,7 +7926,7 @@
         <p:spPr>
           <a:xfrm>
             <a:off x="0" y="0"/>
-            <a:ext cx="118872" cy="6858000"/>
+            <a:ext cx="164592" cy="6858000"/>
           </a:xfrm>
           <a:prstGeom prst="rect">
             <a:avLst/>
@@ -7986,7 +8039,7 @@
         </p:nvSpPr>
         <p:spPr>
           <a:xfrm>
-            <a:off x="548640" y="457200"/>
+            <a:off x="548640" y="502920"/>
             <a:ext cx="11064240" cy="777240"/>
           </a:xfrm>
           <a:prstGeom prst="rect">
@@ -8000,9 +8053,9 @@
           </a:bodyPr>
           <a:lstStyle/>
           <a:p>
-            <a:pPr algn="l"/>
-            <a:r>
-              <a:rPr sz="2800" b="1" i="0">
+            <a:pPr algn="ctr"/>
+            <a:r>
+              <a:rPr sz="3000" b="1" i="0">
                 <a:solidFill>
                   <a:srgbClr val="8C2D2D"/>
                 </a:solidFill>
@@ -8021,14 +8074,14 @@
         </p:nvSpPr>
         <p:spPr>
           <a:xfrm>
-            <a:off x="566928" y="1298448"/>
-            <a:ext cx="1234440" cy="82296"/>
+            <a:off x="5394960" y="1298448"/>
+            <a:ext cx="1371600" cy="82296"/>
           </a:xfrm>
           <a:prstGeom prst="rect">
             <a:avLst/>
           </a:prstGeom>
           <a:solidFill>
-            <a:srgbClr val="F0DFC8"/>
+            <a:srgbClr val="8C2D2D"/>
           </a:solidFill>
           <a:ln>
             <a:noFill/>
@@ -8065,8 +8118,8 @@
         </p:nvSpPr>
         <p:spPr>
           <a:xfrm>
-            <a:off x="594360" y="1645920"/>
-            <a:ext cx="3200400" cy="457200"/>
+            <a:off x="640080" y="1691640"/>
+            <a:ext cx="10972800" cy="457200"/>
           </a:xfrm>
           <a:prstGeom prst="rect">
             <a:avLst/>
@@ -8079,9 +8132,9 @@
           </a:bodyPr>
           <a:lstStyle/>
           <a:p>
-            <a:pPr algn="l"/>
-            <a:r>
-              <a:rPr sz="1400" b="1" i="0">
+            <a:pPr algn="ctr"/>
+            <a:r>
+              <a:rPr sz="1500" b="1" i="0">
                 <a:solidFill>
                   <a:srgbClr val="8C2D2D"/>
                 </a:solidFill>
@@ -8100,7 +8153,7 @@
         </p:nvSpPr>
         <p:spPr>
           <a:xfrm>
-            <a:off x="594360" y="2194560"/>
+            <a:off x="640080" y="2240280"/>
             <a:ext cx="10972800" cy="731520"/>
           </a:xfrm>
           <a:prstGeom prst="rect">
@@ -8114,7 +8167,7 @@
           </a:bodyPr>
           <a:lstStyle/>
           <a:p>
-            <a:pPr algn="l"/>
+            <a:pPr algn="ctr"/>
             <a:r>
               <a:rPr sz="1800" b="1" i="0">
                 <a:solidFill>
@@ -8135,8 +8188,8 @@
         </p:nvSpPr>
         <p:spPr>
           <a:xfrm>
-            <a:off x="594360" y="3108960"/>
-            <a:ext cx="10972800" cy="594360"/>
+            <a:off x="640080" y="3154680"/>
+            <a:ext cx="10972800" cy="566928"/>
           </a:xfrm>
           <a:prstGeom prst="rect">
             <a:avLst/>
@@ -8149,9 +8202,9 @@
           </a:bodyPr>
           <a:lstStyle/>
           <a:p>
-            <a:pPr algn="l"/>
-            <a:r>
-              <a:rPr sz="1600" b="0" i="0">
+            <a:pPr algn="ctr"/>
+            <a:r>
+              <a:rPr sz="1700" b="0" i="0">
                 <a:solidFill>
                   <a:srgbClr val="2B2118"/>
                 </a:solidFill>
@@ -8170,8 +8223,8 @@
         </p:nvSpPr>
         <p:spPr>
           <a:xfrm>
-            <a:off x="594360" y="3822191"/>
-            <a:ext cx="10972800" cy="594360"/>
+            <a:off x="640080" y="4361688"/>
+            <a:ext cx="10972800" cy="566928"/>
           </a:xfrm>
           <a:prstGeom prst="rect">
             <a:avLst/>
@@ -8184,9 +8237,9 @@
           </a:bodyPr>
           <a:lstStyle/>
           <a:p>
-            <a:pPr algn="l"/>
-            <a:r>
-              <a:rPr sz="1600" b="0" i="0">
+            <a:pPr algn="ctr"/>
+            <a:r>
+              <a:rPr sz="1700" b="0" i="0">
                 <a:solidFill>
                   <a:srgbClr val="2B2118"/>
                 </a:solidFill>
@@ -8205,8 +8258,8 @@
         </p:nvSpPr>
         <p:spPr>
           <a:xfrm>
-            <a:off x="594360" y="4535424"/>
-            <a:ext cx="10972800" cy="594360"/>
+            <a:off x="640080" y="5568696"/>
+            <a:ext cx="10972800" cy="566928"/>
           </a:xfrm>
           <a:prstGeom prst="rect">
             <a:avLst/>
@@ -8219,9 +8272,9 @@
           </a:bodyPr>
           <a:lstStyle/>
           <a:p>
-            <a:pPr algn="l"/>
-            <a:r>
-              <a:rPr sz="1600" b="0" i="0">
+            <a:pPr algn="ctr"/>
+            <a:r>
+              <a:rPr sz="1700" b="0" i="0">
                 <a:solidFill>
                   <a:srgbClr val="2B2118"/>
                 </a:solidFill>
@@ -8240,8 +8293,8 @@
         </p:nvSpPr>
         <p:spPr>
           <a:xfrm>
-            <a:off x="594360" y="5248656"/>
-            <a:ext cx="10972800" cy="594360"/>
+            <a:off x="640080" y="6775704"/>
+            <a:ext cx="10972800" cy="566928"/>
           </a:xfrm>
           <a:prstGeom prst="rect">
             <a:avLst/>
@@ -8254,9 +8307,9 @@
           </a:bodyPr>
           <a:lstStyle/>
           <a:p>
-            <a:pPr algn="l"/>
-            <a:r>
-              <a:rPr sz="1600" b="0" i="0">
+            <a:pPr algn="ctr"/>
+            <a:r>
+              <a:rPr sz="1700" b="0" i="0">
                 <a:solidFill>
                   <a:srgbClr val="2B2118"/>
                 </a:solidFill>
@@ -8302,7 +8355,7 @@
         <p:spPr>
           <a:xfrm>
             <a:off x="0" y="0"/>
-            <a:ext cx="118872" cy="6858000"/>
+            <a:ext cx="164592" cy="6858000"/>
           </a:xfrm>
           <a:prstGeom prst="rect">
             <a:avLst/>
@@ -8415,7 +8468,7 @@
         </p:nvSpPr>
         <p:spPr>
           <a:xfrm>
-            <a:off x="548640" y="457200"/>
+            <a:off x="548640" y="502920"/>
             <a:ext cx="11064240" cy="777240"/>
           </a:xfrm>
           <a:prstGeom prst="rect">
@@ -8429,9 +8482,9 @@
           </a:bodyPr>
           <a:lstStyle/>
           <a:p>
-            <a:pPr algn="l"/>
-            <a:r>
-              <a:rPr sz="2800" b="1" i="0">
+            <a:pPr algn="ctr"/>
+            <a:r>
+              <a:rPr sz="3000" b="1" i="0">
                 <a:solidFill>
                   <a:srgbClr val="8C2D2D"/>
                 </a:solidFill>
@@ -8450,14 +8503,14 @@
         </p:nvSpPr>
         <p:spPr>
           <a:xfrm>
-            <a:off x="566928" y="1298448"/>
-            <a:ext cx="1234440" cy="82296"/>
+            <a:off x="5394960" y="1298448"/>
+            <a:ext cx="1371600" cy="82296"/>
           </a:xfrm>
           <a:prstGeom prst="rect">
             <a:avLst/>
           </a:prstGeom>
           <a:solidFill>
-            <a:srgbClr val="F0DFC8"/>
+            <a:srgbClr val="8C2D2D"/>
           </a:solidFill>
           <a:ln>
             <a:noFill/>
@@ -8494,8 +8547,8 @@
         </p:nvSpPr>
         <p:spPr>
           <a:xfrm>
-            <a:off x="594360" y="1645920"/>
-            <a:ext cx="3200400" cy="457200"/>
+            <a:off x="640080" y="1691640"/>
+            <a:ext cx="10972800" cy="457200"/>
           </a:xfrm>
           <a:prstGeom prst="rect">
             <a:avLst/>
@@ -8508,9 +8561,9 @@
           </a:bodyPr>
           <a:lstStyle/>
           <a:p>
-            <a:pPr algn="l"/>
-            <a:r>
-              <a:rPr sz="1400" b="1" i="0">
+            <a:pPr algn="ctr"/>
+            <a:r>
+              <a:rPr sz="1500" b="1" i="0">
                 <a:solidFill>
                   <a:srgbClr val="8C2D2D"/>
                 </a:solidFill>
@@ -8529,7 +8582,7 @@
         </p:nvSpPr>
         <p:spPr>
           <a:xfrm>
-            <a:off x="594360" y="2194560"/>
+            <a:off x="640080" y="2240280"/>
             <a:ext cx="10972800" cy="731520"/>
           </a:xfrm>
           <a:prstGeom prst="rect">
@@ -8543,7 +8596,7 @@
           </a:bodyPr>
           <a:lstStyle/>
           <a:p>
-            <a:pPr algn="l"/>
+            <a:pPr algn="ctr"/>
             <a:r>
               <a:rPr sz="1800" b="1" i="0">
                 <a:solidFill>
@@ -8564,8 +8617,8 @@
         </p:nvSpPr>
         <p:spPr>
           <a:xfrm>
-            <a:off x="594360" y="3108960"/>
-            <a:ext cx="10972800" cy="594360"/>
+            <a:off x="640080" y="3154680"/>
+            <a:ext cx="10972800" cy="566928"/>
           </a:xfrm>
           <a:prstGeom prst="rect">
             <a:avLst/>
@@ -8578,9 +8631,9 @@
           </a:bodyPr>
           <a:lstStyle/>
           <a:p>
-            <a:pPr algn="l"/>
-            <a:r>
-              <a:rPr sz="1600" b="0" i="0">
+            <a:pPr algn="ctr"/>
+            <a:r>
+              <a:rPr sz="1700" b="0" i="0">
                 <a:solidFill>
                   <a:srgbClr val="2B2118"/>
                 </a:solidFill>
@@ -8599,8 +8652,8 @@
         </p:nvSpPr>
         <p:spPr>
           <a:xfrm>
-            <a:off x="594360" y="3822191"/>
-            <a:ext cx="10972800" cy="594360"/>
+            <a:off x="640080" y="4361688"/>
+            <a:ext cx="10972800" cy="566928"/>
           </a:xfrm>
           <a:prstGeom prst="rect">
             <a:avLst/>
@@ -8613,9 +8666,9 @@
           </a:bodyPr>
           <a:lstStyle/>
           <a:p>
-            <a:pPr algn="l"/>
-            <a:r>
-              <a:rPr sz="1600" b="0" i="0">
+            <a:pPr algn="ctr"/>
+            <a:r>
+              <a:rPr sz="1700" b="0" i="0">
                 <a:solidFill>
                   <a:srgbClr val="2B2118"/>
                 </a:solidFill>
@@ -8634,8 +8687,8 @@
         </p:nvSpPr>
         <p:spPr>
           <a:xfrm>
-            <a:off x="594360" y="4535424"/>
-            <a:ext cx="10972800" cy="594360"/>
+            <a:off x="640080" y="5568696"/>
+            <a:ext cx="10972800" cy="566928"/>
           </a:xfrm>
           <a:prstGeom prst="rect">
             <a:avLst/>
@@ -8648,9 +8701,9 @@
           </a:bodyPr>
           <a:lstStyle/>
           <a:p>
-            <a:pPr algn="l"/>
-            <a:r>
-              <a:rPr sz="1600" b="0" i="0">
+            <a:pPr algn="ctr"/>
+            <a:r>
+              <a:rPr sz="1700" b="0" i="0">
                 <a:solidFill>
                   <a:srgbClr val="2B2118"/>
                 </a:solidFill>
@@ -8669,8 +8722,8 @@
         </p:nvSpPr>
         <p:spPr>
           <a:xfrm>
-            <a:off x="594360" y="5248656"/>
-            <a:ext cx="10972800" cy="594360"/>
+            <a:off x="640080" y="6775704"/>
+            <a:ext cx="10972800" cy="566928"/>
           </a:xfrm>
           <a:prstGeom prst="rect">
             <a:avLst/>
@@ -8683,9 +8736,9 @@
           </a:bodyPr>
           <a:lstStyle/>
           <a:p>
-            <a:pPr algn="l"/>
-            <a:r>
-              <a:rPr sz="1600" b="0" i="0">
+            <a:pPr algn="ctr"/>
+            <a:r>
+              <a:rPr sz="1700" b="0" i="0">
                 <a:solidFill>
                   <a:srgbClr val="2B2118"/>
                 </a:solidFill>
@@ -8731,7 +8784,7 @@
         <p:spPr>
           <a:xfrm>
             <a:off x="0" y="0"/>
-            <a:ext cx="118872" cy="6858000"/>
+            <a:ext cx="164592" cy="6858000"/>
           </a:xfrm>
           <a:prstGeom prst="rect">
             <a:avLst/>
@@ -8844,7 +8897,7 @@
         </p:nvSpPr>
         <p:spPr>
           <a:xfrm>
-            <a:off x="548640" y="457200"/>
+            <a:off x="548640" y="502920"/>
             <a:ext cx="11064240" cy="777240"/>
           </a:xfrm>
           <a:prstGeom prst="rect">
@@ -8858,9 +8911,9 @@
           </a:bodyPr>
           <a:lstStyle/>
           <a:p>
-            <a:pPr algn="l"/>
-            <a:r>
-              <a:rPr sz="2800" b="1" i="0">
+            <a:pPr algn="ctr"/>
+            <a:r>
+              <a:rPr sz="3000" b="1" i="0">
                 <a:solidFill>
                   <a:srgbClr val="8C2D2D"/>
                 </a:solidFill>
@@ -8879,14 +8932,14 @@
         </p:nvSpPr>
         <p:spPr>
           <a:xfrm>
-            <a:off x="566928" y="1298448"/>
-            <a:ext cx="1234440" cy="82296"/>
+            <a:off x="5394960" y="1298448"/>
+            <a:ext cx="1371600" cy="82296"/>
           </a:xfrm>
           <a:prstGeom prst="rect">
             <a:avLst/>
           </a:prstGeom>
           <a:solidFill>
-            <a:srgbClr val="F0DFC8"/>
+            <a:srgbClr val="8C2D2D"/>
           </a:solidFill>
           <a:ln>
             <a:noFill/>
@@ -8923,8 +8976,8 @@
         </p:nvSpPr>
         <p:spPr>
           <a:xfrm>
-            <a:off x="594360" y="1645920"/>
-            <a:ext cx="3200400" cy="457200"/>
+            <a:off x="640080" y="1691640"/>
+            <a:ext cx="10972800" cy="457200"/>
           </a:xfrm>
           <a:prstGeom prst="rect">
             <a:avLst/>
@@ -8937,9 +8990,9 @@
           </a:bodyPr>
           <a:lstStyle/>
           <a:p>
-            <a:pPr algn="l"/>
-            <a:r>
-              <a:rPr sz="1400" b="1" i="0">
+            <a:pPr algn="ctr"/>
+            <a:r>
+              <a:rPr sz="1500" b="1" i="0">
                 <a:solidFill>
                   <a:srgbClr val="8C2D2D"/>
                 </a:solidFill>
@@ -8958,7 +9011,7 @@
         </p:nvSpPr>
         <p:spPr>
           <a:xfrm>
-            <a:off x="594360" y="2194560"/>
+            <a:off x="640080" y="2240280"/>
             <a:ext cx="10972800" cy="731520"/>
           </a:xfrm>
           <a:prstGeom prst="rect">
@@ -8972,7 +9025,7 @@
           </a:bodyPr>
           <a:lstStyle/>
           <a:p>
-            <a:pPr algn="l"/>
+            <a:pPr algn="ctr"/>
             <a:r>
               <a:rPr sz="1800" b="1" i="0">
                 <a:solidFill>
@@ -8993,8 +9046,8 @@
         </p:nvSpPr>
         <p:spPr>
           <a:xfrm>
-            <a:off x="594360" y="3108960"/>
-            <a:ext cx="10972800" cy="594360"/>
+            <a:off x="640080" y="3154680"/>
+            <a:ext cx="10972800" cy="566928"/>
           </a:xfrm>
           <a:prstGeom prst="rect">
             <a:avLst/>
@@ -9007,9 +9060,9 @@
           </a:bodyPr>
           <a:lstStyle/>
           <a:p>
-            <a:pPr algn="l"/>
-            <a:r>
-              <a:rPr sz="1600" b="0" i="0">
+            <a:pPr algn="ctr"/>
+            <a:r>
+              <a:rPr sz="1700" b="0" i="0">
                 <a:solidFill>
                   <a:srgbClr val="2B2118"/>
                 </a:solidFill>
@@ -9028,8 +9081,8 @@
         </p:nvSpPr>
         <p:spPr>
           <a:xfrm>
-            <a:off x="594360" y="3822191"/>
-            <a:ext cx="10972800" cy="594360"/>
+            <a:off x="640080" y="4361688"/>
+            <a:ext cx="10972800" cy="566928"/>
           </a:xfrm>
           <a:prstGeom prst="rect">
             <a:avLst/>
@@ -9042,9 +9095,9 @@
           </a:bodyPr>
           <a:lstStyle/>
           <a:p>
-            <a:pPr algn="l"/>
-            <a:r>
-              <a:rPr sz="1600" b="0" i="0">
+            <a:pPr algn="ctr"/>
+            <a:r>
+              <a:rPr sz="1700" b="0" i="0">
                 <a:solidFill>
                   <a:srgbClr val="2B2118"/>
                 </a:solidFill>
@@ -9063,8 +9116,8 @@
         </p:nvSpPr>
         <p:spPr>
           <a:xfrm>
-            <a:off x="594360" y="4535424"/>
-            <a:ext cx="10972800" cy="594360"/>
+            <a:off x="640080" y="5568696"/>
+            <a:ext cx="10972800" cy="566928"/>
           </a:xfrm>
           <a:prstGeom prst="rect">
             <a:avLst/>
@@ -9077,9 +9130,9 @@
           </a:bodyPr>
           <a:lstStyle/>
           <a:p>
-            <a:pPr algn="l"/>
-            <a:r>
-              <a:rPr sz="1600" b="0" i="0">
+            <a:pPr algn="ctr"/>
+            <a:r>
+              <a:rPr sz="1700" b="0" i="0">
                 <a:solidFill>
                   <a:srgbClr val="2B2118"/>
                 </a:solidFill>
@@ -9098,8 +9151,8 @@
         </p:nvSpPr>
         <p:spPr>
           <a:xfrm>
-            <a:off x="594360" y="5248656"/>
-            <a:ext cx="10972800" cy="594360"/>
+            <a:off x="640080" y="6775704"/>
+            <a:ext cx="10972800" cy="566928"/>
           </a:xfrm>
           <a:prstGeom prst="rect">
             <a:avLst/>
@@ -9112,9 +9165,9 @@
           </a:bodyPr>
           <a:lstStyle/>
           <a:p>
-            <a:pPr algn="l"/>
-            <a:r>
-              <a:rPr sz="1600" b="0" i="0">
+            <a:pPr algn="ctr"/>
+            <a:r>
+              <a:rPr sz="1700" b="0" i="0">
                 <a:solidFill>
                   <a:srgbClr val="2B2118"/>
                 </a:solidFill>
